--- a/examples/01_quantum_gpu/Presentation.pptx
+++ b/examples/01_quantum_gpu/Presentation.pptx
@@ -7,11 +7,9 @@
   <p:sldIdLst>
     <p:sldId id="256" r:id="rId2"/>
     <p:sldId id="257" r:id="rId3"/>
-    <p:sldId id="258" r:id="rId4"/>
-    <p:sldId id="259" r:id="rId5"/>
   </p:sldIdLst>
   <p:notesMasterIdLst>
-    <p:notesMasterId r:id="rId6"/>
+    <p:notesMasterId r:id="rId4"/>
   </p:notesMasterIdLst>
   <p:sldSz cx="12192000" cy="6858000"/>
   <p:notesSz cx="6858000" cy="12192000"/>
@@ -505,8 +503,8 @@
           <a:p>
             <a:r>
               <a:rPr lang="en-US" dirty="0"/>
-              <a:t>1. Hero
-note: [오프닝] 상온 양자 오류를 극복하고 대규모 시뮬레이션을 가속하는 Q-GPU 하이브리드 아키텍처를 발표합니다.</a:t>
+              <a:t>Slide 1: Terminal Hero
+note: 양자 터미널 기반 분산 가속 엔진의 아키텍처와 성능 지표를 설명합니다.</a:t>
             </a:r>
             <a:endParaRPr lang="en-US" dirty="0"/>
           </a:p>
@@ -594,8 +592,8 @@
           <a:p>
             <a:r>
               <a:rPr lang="en-US" dirty="0"/>
-              <a:t>2. Split Agenda
-note: [아젠다] 4단계로 나누어 양자 노이즈 극복과 실증 성과를 설명하겠습니다.</a:t>
+              <a:t>Slide 2: Table &amp; Registers
+note: 클래시컬 HPC 및 단독 NISQ 대비 1200배 빠른 처리 속도 비교표입니다.</a:t>
             </a:r>
             <a:endParaRPr lang="en-US" dirty="0"/>
           </a:p>
@@ -619,184 +617,6 @@
             <a:fld id="{F7021451-1387-4CA6-816F-3879F97B5CBC}" type="slidenum">
               <a:rPr lang="en-US"/>
               <a:t>2</a:t>
-            </a:fld>
-            <a:endParaRPr lang="en-US"/>
-          </a:p>
-        </p:txBody>
-      </p:sp>
-    </p:spTree>
-    <p:extLst>
-      <p:ext uri="{BB962C8B-B14F-4D97-AF65-F5344CB8AC3E}">
-        <p14:creationId xmlns:p14="http://schemas.microsoft.com/office/powerpoint/2010/main" val="1024086991"/>
-      </p:ext>
-    </p:extLst>
-  </p:cSld>
-  <p:clrMapOvr>
-    <a:masterClrMapping/>
-  </p:clrMapOvr>
-</p:notes>
-</file>
-
-<file path=ppt/notesSlides/notesSlide3.xml><?xml version="1.0" encoding="utf-8"?>
-<p:notes xmlns:a="http://schemas.openxmlformats.org/drawingml/2006/main" xmlns:r="http://schemas.openxmlformats.org/officeDocument/2006/relationships" xmlns:p="http://schemas.openxmlformats.org/presentationml/2006/main">
-  <p:cSld>
-    <p:spTree>
-      <p:nvGrpSpPr>
-        <p:cNvPr id="1" name=""/>
-        <p:cNvGrpSpPr/>
-        <p:nvPr/>
-      </p:nvGrpSpPr>
-      <p:grpSpPr>
-        <a:xfrm>
-          <a:off x="0" y="0"/>
-          <a:ext cx="0" cy="0"/>
-          <a:chOff x="0" y="0"/>
-          <a:chExt cx="0" cy="0"/>
-        </a:xfrm>
-      </p:grpSpPr>
-      <p:sp>
-        <p:nvSpPr>
-          <p:cNvPr id="2" name="Slide Image Placeholder 1"/>
-          <p:cNvSpPr>
-            <a:spLocks noGrp="1" noRot="1" noChangeAspect="1"/>
-          </p:cNvSpPr>
-          <p:nvPr>
-            <p:ph type="sldImg"/>
-          </p:nvPr>
-        </p:nvSpPr>
-        <p:spPr/>
-      </p:sp>
-      <p:sp>
-        <p:nvSpPr>
-          <p:cNvPr id="3" name="Notes Placeholder 2"/>
-          <p:cNvSpPr>
-            <a:spLocks noGrp="1"/>
-          </p:cNvSpPr>
-          <p:nvPr>
-            <p:ph type="body" idx="1"/>
-          </p:nvPr>
-        </p:nvSpPr>
-        <p:spPr/>
-        <p:txBody>
-          <a:bodyPr/>
-          <a:lstStyle/>
-          <a:p>
-            <a:r>
-              <a:rPr lang="en-US" dirty="0"/>
-              <a:t>3. Big Stats
-note: [성과] 1200배 속도 향상과 99.98% 오류 보정을 달성했습니다.</a:t>
-            </a:r>
-            <a:endParaRPr lang="en-US" dirty="0"/>
-          </a:p>
-        </p:txBody>
-      </p:sp>
-      <p:sp>
-        <p:nvSpPr>
-          <p:cNvPr id="4" name="Slide Number Placeholder 3"/>
-          <p:cNvSpPr>
-            <a:spLocks noGrp="1"/>
-          </p:cNvSpPr>
-          <p:nvPr>
-            <p:ph type="sldNum" sz="quarter" idx="10"/>
-          </p:nvPr>
-        </p:nvSpPr>
-        <p:spPr/>
-        <p:txBody>
-          <a:bodyPr/>
-          <a:lstStyle/>
-          <a:p>
-            <a:fld id="{F7021451-1387-4CA6-816F-3879F97B5CBC}" type="slidenum">
-              <a:rPr lang="en-US"/>
-              <a:t>3</a:t>
-            </a:fld>
-            <a:endParaRPr lang="en-US"/>
-          </a:p>
-        </p:txBody>
-      </p:sp>
-    </p:spTree>
-    <p:extLst>
-      <p:ext uri="{BB962C8B-B14F-4D97-AF65-F5344CB8AC3E}">
-        <p14:creationId xmlns:p14="http://schemas.microsoft.com/office/powerpoint/2010/main" val="1024086991"/>
-      </p:ext>
-    </p:extLst>
-  </p:cSld>
-  <p:clrMapOvr>
-    <a:masterClrMapping/>
-  </p:clrMapOvr>
-</p:notes>
-</file>
-
-<file path=ppt/notesSlides/notesSlide4.xml><?xml version="1.0" encoding="utf-8"?>
-<p:notes xmlns:a="http://schemas.openxmlformats.org/drawingml/2006/main" xmlns:r="http://schemas.openxmlformats.org/officeDocument/2006/relationships" xmlns:p="http://schemas.openxmlformats.org/presentationml/2006/main">
-  <p:cSld>
-    <p:spTree>
-      <p:nvGrpSpPr>
-        <p:cNvPr id="1" name=""/>
-        <p:cNvGrpSpPr/>
-        <p:nvPr/>
-      </p:nvGrpSpPr>
-      <p:grpSpPr>
-        <a:xfrm>
-          <a:off x="0" y="0"/>
-          <a:ext cx="0" cy="0"/>
-          <a:chOff x="0" y="0"/>
-          <a:chExt cx="0" cy="0"/>
-        </a:xfrm>
-      </p:grpSpPr>
-      <p:sp>
-        <p:nvSpPr>
-          <p:cNvPr id="2" name="Slide Image Placeholder 1"/>
-          <p:cNvSpPr>
-            <a:spLocks noGrp="1" noRot="1" noChangeAspect="1"/>
-          </p:cNvSpPr>
-          <p:nvPr>
-            <p:ph type="sldImg"/>
-          </p:nvPr>
-        </p:nvSpPr>
-        <p:spPr/>
-      </p:sp>
-      <p:sp>
-        <p:nvSpPr>
-          <p:cNvPr id="3" name="Notes Placeholder 2"/>
-          <p:cNvSpPr>
-            <a:spLocks noGrp="1"/>
-          </p:cNvSpPr>
-          <p:nvPr>
-            <p:ph type="body" idx="1"/>
-          </p:nvPr>
-        </p:nvSpPr>
-        <p:spPr/>
-        <p:txBody>
-          <a:bodyPr/>
-          <a:lstStyle/>
-          <a:p>
-            <a:r>
-              <a:rPr lang="en-US" dirty="0"/>
-              <a:t>4. Closing
-note: [마무리] 경청해 주셔서 감사합니다. 질문을 받겠습니다.</a:t>
-            </a:r>
-            <a:endParaRPr lang="en-US" dirty="0"/>
-          </a:p>
-        </p:txBody>
-      </p:sp>
-      <p:sp>
-        <p:nvSpPr>
-          <p:cNvPr id="4" name="Slide Number Placeholder 3"/>
-          <p:cNvSpPr>
-            <a:spLocks noGrp="1"/>
-          </p:cNvSpPr>
-          <p:nvPr>
-            <p:ph type="sldNum" sz="quarter" idx="10"/>
-          </p:nvPr>
-        </p:nvSpPr>
-        <p:spPr/>
-        <p:txBody>
-          <a:bodyPr/>
-          <a:lstStyle/>
-          <a:p>
-            <a:fld id="{F7021451-1387-4CA6-816F-3879F97B5CBC}" type="slidenum">
-              <a:rPr lang="en-US"/>
-              <a:t>4</a:t>
             </a:fld>
             <a:endParaRPr lang="en-US"/>
           </a:p>
@@ -1164,84 +984,6 @@
 <file path=ppt/slides/slide2.xml><?xml version="1.0" encoding="utf-8"?>
 <p:sld xmlns:a="http://schemas.openxmlformats.org/drawingml/2006/main" xmlns:r="http://schemas.openxmlformats.org/officeDocument/2006/relationships" xmlns:p="http://schemas.openxmlformats.org/presentationml/2006/main">
   <p:cSld name="Slide 2">
-    <p:bg>
-      <p:bgPr>
-        <a:blipFill dpi="0" rotWithShape="1">
-          <a:blip r:embed="rId1">
-            <a:lum/>
-          </a:blip>
-          <a:srcRect/>
-          <a:stretch>
-            <a:fillRect/>
-          </a:stretch>
-        </a:blipFill>
-        <a:effectLst/>
-      </p:bgPr>
-    </p:bg>
-    <p:spTree>
-      <p:nvGrpSpPr>
-        <p:cNvPr id="1" name=""/>
-        <p:cNvGrpSpPr/>
-        <p:nvPr/>
-      </p:nvGrpSpPr>
-      <p:grpSpPr>
-        <a:xfrm>
-          <a:off x="0" y="0"/>
-          <a:ext cx="0" cy="0"/>
-          <a:chOff x="0" y="0"/>
-          <a:chExt cx="0" cy="0"/>
-        </a:xfrm>
-      </p:grpSpPr>
-    </p:spTree>
-  </p:cSld>
-  <p:clrMapOvr>
-    <a:masterClrMapping/>
-  </p:clrMapOvr>
-</p:sld>
-</file>
-
-<file path=ppt/slides/slide3.xml><?xml version="1.0" encoding="utf-8"?>
-<p:sld xmlns:a="http://schemas.openxmlformats.org/drawingml/2006/main" xmlns:r="http://schemas.openxmlformats.org/officeDocument/2006/relationships" xmlns:p="http://schemas.openxmlformats.org/presentationml/2006/main">
-  <p:cSld name="Slide 3">
-    <p:bg>
-      <p:bgPr>
-        <a:blipFill dpi="0" rotWithShape="1">
-          <a:blip r:embed="rId1">
-            <a:lum/>
-          </a:blip>
-          <a:srcRect/>
-          <a:stretch>
-            <a:fillRect/>
-          </a:stretch>
-        </a:blipFill>
-        <a:effectLst/>
-      </p:bgPr>
-    </p:bg>
-    <p:spTree>
-      <p:nvGrpSpPr>
-        <p:cNvPr id="1" name=""/>
-        <p:cNvGrpSpPr/>
-        <p:nvPr/>
-      </p:nvGrpSpPr>
-      <p:grpSpPr>
-        <a:xfrm>
-          <a:off x="0" y="0"/>
-          <a:ext cx="0" cy="0"/>
-          <a:chOff x="0" y="0"/>
-          <a:chExt cx="0" cy="0"/>
-        </a:xfrm>
-      </p:grpSpPr>
-    </p:spTree>
-  </p:cSld>
-  <p:clrMapOvr>
-    <a:masterClrMapping/>
-  </p:clrMapOvr>
-</p:sld>
-</file>
-
-<file path=ppt/slides/slide4.xml><?xml version="1.0" encoding="utf-8"?>
-<p:sld xmlns:a="http://schemas.openxmlformats.org/drawingml/2006/main" xmlns:r="http://schemas.openxmlformats.org/officeDocument/2006/relationships" xmlns:p="http://schemas.openxmlformats.org/presentationml/2006/main">
-  <p:cSld name="Slide 4">
     <p:bg>
       <p:bgPr>
         <a:blipFill dpi="0" rotWithShape="1">

--- a/examples/01_quantum_gpu/Presentation.pptx
+++ b/examples/01_quantum_gpu/Presentation.pptx
@@ -503,8 +503,7 @@
           <a:p>
             <a:r>
               <a:rPr lang="en-US" dirty="0"/>
-              <a:t>Slide 1: Terminal Hero
-note: 양자 터미널 기반 분산 가속 엔진의 아키텍처와 성능 지표를 설명합니다.</a:t>
+              <a:t>양자 터미널 기반 분산 가속 엔진의 아키텍처와 성능 지표를 설명합니다.</a:t>
             </a:r>
             <a:endParaRPr lang="en-US" dirty="0"/>
           </a:p>
@@ -592,8 +591,7 @@
           <a:p>
             <a:r>
               <a:rPr lang="en-US" dirty="0"/>
-              <a:t>Slide 2: Table &amp; Registers
-note: 클래시컬 HPC 및 단독 NISQ 대비 1200배 빠른 처리 속도 비교표입니다.</a:t>
+              <a:t>클래시컬 HPC 및 단독 NISQ 대비 1200배 빠른 처리 속도 비교표입니다.</a:t>
             </a:r>
             <a:endParaRPr lang="en-US" dirty="0"/>
           </a:p>
@@ -947,16 +945,9 @@
   <p:cSld name="Slide 1">
     <p:bg>
       <p:bgPr>
-        <a:blipFill dpi="0" rotWithShape="1">
-          <a:blip r:embed="rId1">
-            <a:lum/>
-          </a:blip>
-          <a:srcRect/>
-          <a:stretch>
-            <a:fillRect/>
-          </a:stretch>
-        </a:blipFill>
-        <a:effectLst/>
+        <a:solidFill>
+          <a:srgbClr val="050811"/>
+        </a:solidFill>
       </p:bgPr>
     </p:bg>
     <p:spTree>
@@ -973,6 +964,1281 @@
           <a:chExt cx="0" cy="0"/>
         </a:xfrm>
       </p:grpSpPr>
+      <p:sp>
+        <p:nvSpPr>
+          <p:cNvPr id="2" name="Shape 0"/>
+          <p:cNvSpPr/>
+          <p:nvPr/>
+        </p:nvSpPr>
+        <p:spPr>
+          <a:xfrm>
+            <a:off x="476220" y="381030"/>
+            <a:ext cx="11239530" cy="482255"/>
+          </a:xfrm>
+          <a:prstGeom prst="roundRect">
+            <a:avLst>
+              <a:gd name="adj" fmla="val 15794"/>
+            </a:avLst>
+          </a:prstGeom>
+          <a:solidFill>
+            <a:srgbClr val="0E1626"/>
+          </a:solidFill>
+          <a:ln w="9525">
+            <a:solidFill>
+              <a:srgbClr val="1E293B"/>
+            </a:solidFill>
+            <a:prstDash val="solid"/>
+          </a:ln>
+        </p:spPr>
+      </p:sp>
+      <p:sp>
+        <p:nvSpPr>
+          <p:cNvPr id="3" name="Shape 1"/>
+          <p:cNvSpPr/>
+          <p:nvPr/>
+        </p:nvSpPr>
+        <p:spPr>
+          <a:xfrm>
+            <a:off x="638160" y="574426"/>
+            <a:ext cx="95280" cy="95280"/>
+          </a:xfrm>
+          <a:prstGeom prst="roundRect">
+            <a:avLst>
+              <a:gd name="adj" fmla="val 50000"/>
+            </a:avLst>
+          </a:prstGeom>
+          <a:solidFill>
+            <a:srgbClr val="EF4444"/>
+          </a:solidFill>
+          <a:ln/>
+        </p:spPr>
+      </p:sp>
+      <p:sp>
+        <p:nvSpPr>
+          <p:cNvPr id="4" name="Shape 2"/>
+          <p:cNvSpPr/>
+          <p:nvPr/>
+        </p:nvSpPr>
+        <p:spPr>
+          <a:xfrm>
+            <a:off x="790590" y="574426"/>
+            <a:ext cx="95280" cy="95280"/>
+          </a:xfrm>
+          <a:prstGeom prst="roundRect">
+            <a:avLst>
+              <a:gd name="adj" fmla="val 50000"/>
+            </a:avLst>
+          </a:prstGeom>
+          <a:solidFill>
+            <a:srgbClr val="F59E0B"/>
+          </a:solidFill>
+          <a:ln/>
+        </p:spPr>
+      </p:sp>
+      <p:sp>
+        <p:nvSpPr>
+          <p:cNvPr id="5" name="Shape 3"/>
+          <p:cNvSpPr/>
+          <p:nvPr/>
+        </p:nvSpPr>
+        <p:spPr>
+          <a:xfrm>
+            <a:off x="943021" y="574426"/>
+            <a:ext cx="95280" cy="95280"/>
+          </a:xfrm>
+          <a:prstGeom prst="roundRect">
+            <a:avLst>
+              <a:gd name="adj" fmla="val 50000"/>
+            </a:avLst>
+          </a:prstGeom>
+          <a:solidFill>
+            <a:srgbClr val="10B981"/>
+          </a:solidFill>
+          <a:ln/>
+        </p:spPr>
+      </p:sp>
+      <p:sp>
+        <p:nvSpPr>
+          <p:cNvPr id="6" name="Text 4"/>
+          <p:cNvSpPr txBox="1"/>
+          <p:nvPr/>
+        </p:nvSpPr>
+        <p:spPr>
+          <a:xfrm>
+            <a:off x="1209660" y="459029"/>
+            <a:ext cx="8640714" cy="310805"/>
+          </a:xfrm>
+          <a:prstGeom prst="rect">
+            <a:avLst/>
+          </a:prstGeom>
+          <a:noFill/>
+          <a:ln/>
+        </p:spPr>
+        <p:txBody>
+          <a:bodyPr wrap="none" lIns="0" tIns="0" rIns="0" bIns="0" rtlCol="0" anchor="t"/>
+          <a:lstStyle/>
+          <a:p>
+            <a:pPr algn="l" indent="0" marL="0">
+              <a:lnSpc>
+                <a:spcPts val="2447"/>
+              </a:lnSpc>
+              <a:buNone/>
+            </a:pPr>
+            <a:r>
+              <a:rPr lang="en-US" sz="1631" spc="-54" kern="0" dirty="0">
+                <a:solidFill>
+                  <a:srgbClr val="38BDF8"/>
+                </a:solidFill>
+                <a:latin typeface="Consolas" pitchFamily="34" charset="0"/>
+                <a:ea typeface="Consolas" pitchFamily="34" charset="-122"/>
+                <a:cs typeface="Consolas" pitchFamily="34" charset="-120"/>
+              </a:rPr>
+              <a:t>root@quantum-hpc:~# ./launch_qgpu_cluster.sh --qubits 128 --nodes 64</a:t>
+            </a:r>
+            <a:endParaRPr lang="en-US" sz="1631" dirty="0"/>
+          </a:p>
+        </p:txBody>
+      </p:sp>
+      <p:sp>
+        <p:nvSpPr>
+          <p:cNvPr id="7" name="Shape 5"/>
+          <p:cNvSpPr/>
+          <p:nvPr/>
+        </p:nvSpPr>
+        <p:spPr>
+          <a:xfrm>
+            <a:off x="476220" y="996605"/>
+            <a:ext cx="11239530" cy="5480456"/>
+          </a:xfrm>
+          <a:prstGeom prst="roundRect">
+            <a:avLst>
+              <a:gd name="adj" fmla="val 1390"/>
+            </a:avLst>
+          </a:prstGeom>
+          <a:solidFill>
+            <a:srgbClr val="080D1A"/>
+          </a:solidFill>
+          <a:ln w="9525">
+            <a:solidFill>
+              <a:srgbClr val="1E293B"/>
+            </a:solidFill>
+            <a:prstDash val="solid"/>
+          </a:ln>
+        </p:spPr>
+      </p:sp>
+      <p:sp>
+        <p:nvSpPr>
+          <p:cNvPr id="8" name="Text 6"/>
+          <p:cNvSpPr txBox="1"/>
+          <p:nvPr/>
+        </p:nvSpPr>
+        <p:spPr>
+          <a:xfrm>
+            <a:off x="695310" y="1193383"/>
+            <a:ext cx="11643330" cy="339791"/>
+          </a:xfrm>
+          <a:prstGeom prst="rect">
+            <a:avLst/>
+          </a:prstGeom>
+          <a:noFill/>
+          <a:ln/>
+        </p:spPr>
+        <p:txBody>
+          <a:bodyPr wrap="none" lIns="0" tIns="0" rIns="0" bIns="0" rtlCol="0" anchor="t"/>
+          <a:lstStyle/>
+          <a:p>
+            <a:pPr algn="l" indent="0" marL="0">
+              <a:lnSpc>
+                <a:spcPts val="2675"/>
+              </a:lnSpc>
+              <a:buNone/>
+            </a:pPr>
+            <a:r>
+              <a:rPr lang="en-US" sz="1784" b="1" spc="-54" kern="0" dirty="0">
+                <a:solidFill>
+                  <a:srgbClr val="00F0FF"/>
+                </a:solidFill>
+                <a:latin typeface="Consolas" pitchFamily="34" charset="0"/>
+                <a:ea typeface="Consolas" pitchFamily="34" charset="-122"/>
+                <a:cs typeface="Consolas" pitchFamily="34" charset="-120"/>
+              </a:rPr>
+              <a:t>[INIT] QUANTUM ACCELERATOR v4.2 LOADED</a:t>
+            </a:r>
+            <a:endParaRPr lang="en-US" sz="1784" dirty="0"/>
+          </a:p>
+        </p:txBody>
+      </p:sp>
+      <p:sp>
+        <p:nvSpPr>
+          <p:cNvPr id="9" name="Text 7"/>
+          <p:cNvSpPr txBox="1"/>
+          <p:nvPr/>
+        </p:nvSpPr>
+        <p:spPr>
+          <a:xfrm>
+            <a:off x="695310" y="1604132"/>
+            <a:ext cx="10801350" cy="1519276"/>
+          </a:xfrm>
+          <a:prstGeom prst="rect">
+            <a:avLst/>
+          </a:prstGeom>
+          <a:noFill/>
+          <a:ln/>
+        </p:spPr>
+        <p:txBody>
+          <a:bodyPr wrap="square" lIns="0" tIns="0" rIns="0" bIns="0" rtlCol="0" anchor="t"/>
+          <a:lstStyle/>
+          <a:p>
+            <a:pPr algn="l" indent="0" marL="0">
+              <a:lnSpc>
+                <a:spcPts val="5981"/>
+              </a:lnSpc>
+              <a:buNone/>
+            </a:pPr>
+            <a:r>
+              <a:rPr lang="en-US" sz="4785" b="1" spc="-144" kern="0" dirty="0">
+                <a:solidFill>
+                  <a:srgbClr val="FFFFFF"/>
+                </a:solidFill>
+                <a:latin typeface="Malgun Gothic" pitchFamily="34" charset="0"/>
+                <a:ea typeface="Malgun Gothic" pitchFamily="34" charset="-122"/>
+                <a:cs typeface="Malgun Gothic" pitchFamily="34" charset="-120"/>
+              </a:rPr>
+              <a:t>양자-GPU 하이브리드</a:t>
+            </a:r>
+            <a:endParaRPr lang="en-US" sz="4785" dirty="0"/>
+          </a:p>
+          <a:p>
+            <a:pPr algn="l" indent="0" marL="0">
+              <a:lnSpc>
+                <a:spcPts val="5981"/>
+              </a:lnSpc>
+              <a:buNone/>
+            </a:pPr>
+            <a:r>
+              <a:rPr lang="en-US" sz="4785" b="1" spc="-144" kern="0" dirty="0">
+                <a:solidFill>
+                  <a:srgbClr val="00F0FF"/>
+                </a:solidFill>
+                <a:latin typeface="Malgun Gothic" pitchFamily="34" charset="0"/>
+                <a:ea typeface="Malgun Gothic" pitchFamily="34" charset="-122"/>
+                <a:cs typeface="Malgun Gothic" pitchFamily="34" charset="-120"/>
+              </a:rPr>
+              <a:t>초고속 분산 연산 가속 엔진</a:t>
+            </a:r>
+            <a:endParaRPr lang="en-US" sz="4785" dirty="0"/>
+          </a:p>
+        </p:txBody>
+      </p:sp>
+      <p:sp>
+        <p:nvSpPr>
+          <p:cNvPr id="10" name="Text 8"/>
+          <p:cNvSpPr txBox="1"/>
+          <p:nvPr/>
+        </p:nvSpPr>
+        <p:spPr>
+          <a:xfrm>
+            <a:off x="695310" y="3386023"/>
+            <a:ext cx="11643330" cy="217170"/>
+          </a:xfrm>
+          <a:prstGeom prst="rect">
+            <a:avLst/>
+          </a:prstGeom>
+          <a:noFill/>
+          <a:ln/>
+        </p:spPr>
+        <p:txBody>
+          <a:bodyPr wrap="none" lIns="0" tIns="0" rIns="0" bIns="0" rtlCol="0" anchor="t"/>
+          <a:lstStyle/>
+          <a:p>
+            <a:pPr algn="l" indent="0" marL="0">
+              <a:lnSpc>
+                <a:spcPts val="1710"/>
+              </a:lnSpc>
+              <a:buNone/>
+            </a:pPr>
+            <a:r>
+              <a:rPr lang="en-US" sz="1140" spc="-54" kern="0" dirty="0">
+                <a:solidFill>
+                  <a:srgbClr val="94A3B8"/>
+                </a:solidFill>
+                <a:latin typeface="Malgun Gothic" pitchFamily="34" charset="0"/>
+                <a:ea typeface="Malgun Gothic" pitchFamily="34" charset="-122"/>
+                <a:cs typeface="Malgun Gothic" pitchFamily="34" charset="-120"/>
+              </a:rPr>
+              <a:t>물리 큐비트 노이즈를 텐서 코어 실시간 역전파로 보정하는 HPC 아키텍처</a:t>
+            </a:r>
+            <a:endParaRPr lang="en-US" sz="1140" dirty="0"/>
+          </a:p>
+        </p:txBody>
+      </p:sp>
+      <p:sp>
+        <p:nvSpPr>
+          <p:cNvPr id="11" name="Shape 9"/>
+          <p:cNvSpPr/>
+          <p:nvPr/>
+        </p:nvSpPr>
+        <p:spPr>
+          <a:xfrm>
+            <a:off x="714421" y="4754240"/>
+            <a:ext cx="5787695" cy="1522842"/>
+          </a:xfrm>
+          <a:prstGeom prst="roundRect">
+            <a:avLst>
+              <a:gd name="adj" fmla="val 3753"/>
+            </a:avLst>
+          </a:prstGeom>
+          <a:solidFill>
+            <a:srgbClr val="040711"/>
+          </a:solidFill>
+          <a:ln w="9525">
+            <a:solidFill>
+              <a:srgbClr val="00F0FF"/>
+            </a:solidFill>
+            <a:prstDash val="solid"/>
+          </a:ln>
+        </p:spPr>
+      </p:sp>
+      <p:sp>
+        <p:nvSpPr>
+          <p:cNvPr id="12" name="Text 10"/>
+          <p:cNvSpPr txBox="1"/>
+          <p:nvPr/>
+        </p:nvSpPr>
+        <p:spPr>
+          <a:xfrm>
+            <a:off x="838230" y="4889297"/>
+            <a:ext cx="5961156" cy="310805"/>
+          </a:xfrm>
+          <a:prstGeom prst="rect">
+            <a:avLst/>
+          </a:prstGeom>
+          <a:noFill/>
+          <a:ln/>
+        </p:spPr>
+        <p:txBody>
+          <a:bodyPr wrap="none" lIns="0" tIns="0" rIns="0" bIns="0" rtlCol="0" anchor="t"/>
+          <a:lstStyle/>
+          <a:p>
+            <a:pPr algn="l" indent="0" marL="0">
+              <a:lnSpc>
+                <a:spcPts val="2447"/>
+              </a:lnSpc>
+              <a:buNone/>
+            </a:pPr>
+            <a:r>
+              <a:rPr lang="en-US" sz="1631" b="1" spc="-54" kern="0" dirty="0">
+                <a:solidFill>
+                  <a:srgbClr val="A78BFA"/>
+                </a:solidFill>
+                <a:latin typeface="Consolas" pitchFamily="34" charset="0"/>
+                <a:ea typeface="Consolas" pitchFamily="34" charset="-122"/>
+                <a:cs typeface="Consolas" pitchFamily="34" charset="-120"/>
+              </a:rPr>
+              <a:t>// QUANTUM CIRCUIT PIPELINE</a:t>
+            </a:r>
+            <a:endParaRPr lang="en-US" sz="1631" dirty="0"/>
+          </a:p>
+        </p:txBody>
+      </p:sp>
+      <p:sp>
+        <p:nvSpPr>
+          <p:cNvPr id="13" name="Text 11"/>
+          <p:cNvSpPr txBox="1"/>
+          <p:nvPr/>
+        </p:nvSpPr>
+        <p:spPr>
+          <a:xfrm>
+            <a:off x="838230" y="5304892"/>
+            <a:ext cx="908091" cy="310805"/>
+          </a:xfrm>
+          <a:prstGeom prst="rect">
+            <a:avLst/>
+          </a:prstGeom>
+          <a:noFill/>
+          <a:ln/>
+        </p:spPr>
+        <p:txBody>
+          <a:bodyPr wrap="none" lIns="0" tIns="0" rIns="0" bIns="0" rtlCol="0" anchor="t"/>
+          <a:lstStyle/>
+          <a:p>
+            <a:pPr algn="l" indent="0" marL="0">
+              <a:lnSpc>
+                <a:spcPts val="2447"/>
+              </a:lnSpc>
+              <a:buNone/>
+            </a:pPr>
+            <a:r>
+              <a:rPr lang="en-US" sz="1631" spc="-54" kern="0" dirty="0">
+                <a:solidFill>
+                  <a:srgbClr val="38BDF8"/>
+                </a:solidFill>
+                <a:latin typeface="Consolas" pitchFamily="34" charset="0"/>
+                <a:ea typeface="Consolas" pitchFamily="34" charset="-122"/>
+                <a:cs typeface="Consolas" pitchFamily="34" charset="-120"/>
+              </a:rPr>
+              <a:t>|q0⟩ ──</a:t>
+            </a:r>
+            <a:endParaRPr lang="en-US" sz="1631" dirty="0"/>
+          </a:p>
+        </p:txBody>
+      </p:sp>
+      <p:sp>
+        <p:nvSpPr>
+          <p:cNvPr id="14" name="Shape 12"/>
+          <p:cNvSpPr/>
+          <p:nvPr/>
+        </p:nvSpPr>
+        <p:spPr>
+          <a:xfrm>
+            <a:off x="1756562" y="5283952"/>
+            <a:ext cx="288859" cy="367955"/>
+          </a:xfrm>
+          <a:prstGeom prst="roundRect">
+            <a:avLst>
+              <a:gd name="adj" fmla="val 13200"/>
+            </a:avLst>
+          </a:prstGeom>
+          <a:solidFill>
+            <a:srgbClr val="1E293B"/>
+          </a:solidFill>
+          <a:ln w="9525">
+            <a:solidFill>
+              <a:srgbClr val="00F0FF"/>
+            </a:solidFill>
+            <a:prstDash val="solid"/>
+          </a:ln>
+        </p:spPr>
+      </p:sp>
+      <p:sp>
+        <p:nvSpPr>
+          <p:cNvPr id="15" name="Text 13"/>
+          <p:cNvSpPr txBox="1"/>
+          <p:nvPr/>
+        </p:nvSpPr>
+        <p:spPr>
+          <a:xfrm>
+            <a:off x="1823314" y="5304892"/>
+            <a:ext cx="193670" cy="310805"/>
+          </a:xfrm>
+          <a:prstGeom prst="rect">
+            <a:avLst/>
+          </a:prstGeom>
+          <a:noFill/>
+          <a:ln/>
+        </p:spPr>
+        <p:txBody>
+          <a:bodyPr wrap="none" lIns="0" tIns="0" rIns="0" bIns="0" rtlCol="0" anchor="t"/>
+          <a:lstStyle/>
+          <a:p>
+            <a:pPr algn="l" indent="0" marL="0">
+              <a:lnSpc>
+                <a:spcPts val="2447"/>
+              </a:lnSpc>
+              <a:buNone/>
+            </a:pPr>
+            <a:r>
+              <a:rPr lang="en-US" sz="1631" b="1" spc="-54" kern="0" dirty="0">
+                <a:solidFill>
+                  <a:srgbClr val="FFFFFF"/>
+                </a:solidFill>
+                <a:latin typeface="Consolas" pitchFamily="34" charset="0"/>
+                <a:ea typeface="Consolas" pitchFamily="34" charset="-122"/>
+                <a:cs typeface="Consolas" pitchFamily="34" charset="-120"/>
+              </a:rPr>
+              <a:t>H</a:t>
+            </a:r>
+            <a:endParaRPr lang="en-US" sz="1631" dirty="0"/>
+          </a:p>
+        </p:txBody>
+      </p:sp>
+      <p:sp>
+        <p:nvSpPr>
+          <p:cNvPr id="16" name="Text 14"/>
+          <p:cNvSpPr txBox="1"/>
+          <p:nvPr/>
+        </p:nvSpPr>
+        <p:spPr>
+          <a:xfrm>
+            <a:off x="2102663" y="5304892"/>
+            <a:ext cx="783184" cy="310805"/>
+          </a:xfrm>
+          <a:prstGeom prst="rect">
+            <a:avLst/>
+          </a:prstGeom>
+          <a:noFill/>
+          <a:ln/>
+        </p:spPr>
+        <p:txBody>
+          <a:bodyPr wrap="none" lIns="0" tIns="0" rIns="0" bIns="0" rtlCol="0" anchor="t"/>
+          <a:lstStyle/>
+          <a:p>
+            <a:pPr algn="l" indent="0" marL="0">
+              <a:lnSpc>
+                <a:spcPts val="2447"/>
+              </a:lnSpc>
+              <a:buNone/>
+            </a:pPr>
+            <a:r>
+              <a:rPr lang="en-US" sz="1631" spc="-54" kern="0" dirty="0">
+                <a:solidFill>
+                  <a:srgbClr val="38BDF8"/>
+                </a:solidFill>
+                <a:latin typeface="Consolas" pitchFamily="34" charset="0"/>
+                <a:ea typeface="Consolas" pitchFamily="34" charset="-122"/>
+                <a:cs typeface="Consolas" pitchFamily="34" charset="-120"/>
+              </a:rPr>
+              <a:t>──────</a:t>
+            </a:r>
+            <a:endParaRPr lang="en-US" sz="1631" dirty="0"/>
+          </a:p>
+        </p:txBody>
+      </p:sp>
+      <p:sp>
+        <p:nvSpPr>
+          <p:cNvPr id="17" name="Shape 15"/>
+          <p:cNvSpPr/>
+          <p:nvPr/>
+        </p:nvSpPr>
+        <p:spPr>
+          <a:xfrm>
+            <a:off x="2904866" y="5283952"/>
+            <a:ext cx="289408" cy="367955"/>
+          </a:xfrm>
+          <a:prstGeom prst="roundRect">
+            <a:avLst>
+              <a:gd name="adj" fmla="val 13175"/>
+            </a:avLst>
+          </a:prstGeom>
+          <a:solidFill>
+            <a:srgbClr val="1E293B"/>
+          </a:solidFill>
+          <a:ln w="9525">
+            <a:solidFill>
+              <a:srgbClr val="00F0FF"/>
+            </a:solidFill>
+            <a:prstDash val="solid"/>
+          </a:ln>
+        </p:spPr>
+      </p:sp>
+      <p:sp>
+        <p:nvSpPr>
+          <p:cNvPr id="18" name="Text 16"/>
+          <p:cNvSpPr txBox="1"/>
+          <p:nvPr/>
+        </p:nvSpPr>
+        <p:spPr>
+          <a:xfrm>
+            <a:off x="2971526" y="5304892"/>
+            <a:ext cx="194127" cy="310805"/>
+          </a:xfrm>
+          <a:prstGeom prst="rect">
+            <a:avLst/>
+          </a:prstGeom>
+          <a:noFill/>
+          <a:ln/>
+        </p:spPr>
+        <p:txBody>
+          <a:bodyPr wrap="none" lIns="0" tIns="0" rIns="0" bIns="0" rtlCol="0" anchor="t"/>
+          <a:lstStyle/>
+          <a:p>
+            <a:pPr algn="l" indent="0" marL="0">
+              <a:lnSpc>
+                <a:spcPts val="2447"/>
+              </a:lnSpc>
+              <a:buNone/>
+            </a:pPr>
+            <a:r>
+              <a:rPr lang="en-US" sz="1631" b="1" spc="-54" kern="0" dirty="0">
+                <a:solidFill>
+                  <a:srgbClr val="FFFFFF"/>
+                </a:solidFill>
+                <a:latin typeface="Consolas" pitchFamily="34" charset="0"/>
+                <a:ea typeface="Consolas" pitchFamily="34" charset="-122"/>
+                <a:cs typeface="Consolas" pitchFamily="34" charset="-120"/>
+              </a:rPr>
+              <a:t>●</a:t>
+            </a:r>
+            <a:endParaRPr lang="en-US" sz="1631" dirty="0"/>
+          </a:p>
+        </p:txBody>
+      </p:sp>
+      <p:sp>
+        <p:nvSpPr>
+          <p:cNvPr id="19" name="Text 17"/>
+          <p:cNvSpPr txBox="1"/>
+          <p:nvPr/>
+        </p:nvSpPr>
+        <p:spPr>
+          <a:xfrm>
+            <a:off x="3251241" y="5304892"/>
+            <a:ext cx="783184" cy="310805"/>
+          </a:xfrm>
+          <a:prstGeom prst="rect">
+            <a:avLst/>
+          </a:prstGeom>
+          <a:noFill/>
+          <a:ln/>
+        </p:spPr>
+        <p:txBody>
+          <a:bodyPr wrap="none" lIns="0" tIns="0" rIns="0" bIns="0" rtlCol="0" anchor="t"/>
+          <a:lstStyle/>
+          <a:p>
+            <a:pPr algn="l" indent="0" marL="0">
+              <a:lnSpc>
+                <a:spcPts val="2447"/>
+              </a:lnSpc>
+              <a:buNone/>
+            </a:pPr>
+            <a:r>
+              <a:rPr lang="en-US" sz="1631" spc="-54" kern="0" dirty="0">
+                <a:solidFill>
+                  <a:srgbClr val="38BDF8"/>
+                </a:solidFill>
+                <a:latin typeface="Consolas" pitchFamily="34" charset="0"/>
+                <a:ea typeface="Consolas" pitchFamily="34" charset="-122"/>
+                <a:cs typeface="Consolas" pitchFamily="34" charset="-120"/>
+              </a:rPr>
+              <a:t>──────</a:t>
+            </a:r>
+            <a:endParaRPr lang="en-US" sz="1631" dirty="0"/>
+          </a:p>
+        </p:txBody>
+      </p:sp>
+      <p:sp>
+        <p:nvSpPr>
+          <p:cNvPr id="20" name="Shape 18"/>
+          <p:cNvSpPr/>
+          <p:nvPr/>
+        </p:nvSpPr>
+        <p:spPr>
+          <a:xfrm>
+            <a:off x="4053444" y="5283952"/>
+            <a:ext cx="288859" cy="367955"/>
+          </a:xfrm>
+          <a:prstGeom prst="roundRect">
+            <a:avLst>
+              <a:gd name="adj" fmla="val 13200"/>
+            </a:avLst>
+          </a:prstGeom>
+          <a:solidFill>
+            <a:srgbClr val="1E293B"/>
+          </a:solidFill>
+          <a:ln w="9525">
+            <a:solidFill>
+              <a:srgbClr val="00F0FF"/>
+            </a:solidFill>
+            <a:prstDash val="solid"/>
+          </a:ln>
+        </p:spPr>
+      </p:sp>
+      <p:sp>
+        <p:nvSpPr>
+          <p:cNvPr id="21" name="Text 19"/>
+          <p:cNvSpPr txBox="1"/>
+          <p:nvPr/>
+        </p:nvSpPr>
+        <p:spPr>
+          <a:xfrm>
+            <a:off x="4120104" y="5304892"/>
+            <a:ext cx="193670" cy="310805"/>
+          </a:xfrm>
+          <a:prstGeom prst="rect">
+            <a:avLst/>
+          </a:prstGeom>
+          <a:noFill/>
+          <a:ln/>
+        </p:spPr>
+        <p:txBody>
+          <a:bodyPr wrap="none" lIns="0" tIns="0" rIns="0" bIns="0" rtlCol="0" anchor="t"/>
+          <a:lstStyle/>
+          <a:p>
+            <a:pPr algn="l" indent="0" marL="0">
+              <a:lnSpc>
+                <a:spcPts val="2447"/>
+              </a:lnSpc>
+              <a:buNone/>
+            </a:pPr>
+            <a:r>
+              <a:rPr lang="en-US" sz="1631" b="1" spc="-54" kern="0" dirty="0">
+                <a:solidFill>
+                  <a:srgbClr val="FFFFFF"/>
+                </a:solidFill>
+                <a:latin typeface="Consolas" pitchFamily="34" charset="0"/>
+                <a:ea typeface="Consolas" pitchFamily="34" charset="-122"/>
+                <a:cs typeface="Consolas" pitchFamily="34" charset="-120"/>
+              </a:rPr>
+              <a:t>X</a:t>
+            </a:r>
+            <a:endParaRPr lang="en-US" sz="1631" dirty="0"/>
+          </a:p>
+        </p:txBody>
+      </p:sp>
+      <p:sp>
+        <p:nvSpPr>
+          <p:cNvPr id="22" name="Text 20"/>
+          <p:cNvSpPr txBox="1"/>
+          <p:nvPr/>
+        </p:nvSpPr>
+        <p:spPr>
+          <a:xfrm>
+            <a:off x="4399544" y="5304892"/>
+            <a:ext cx="1034369" cy="310805"/>
+          </a:xfrm>
+          <a:prstGeom prst="rect">
+            <a:avLst/>
+          </a:prstGeom>
+          <a:noFill/>
+          <a:ln/>
+        </p:spPr>
+        <p:txBody>
+          <a:bodyPr wrap="none" lIns="0" tIns="0" rIns="0" bIns="0" rtlCol="0" anchor="t"/>
+          <a:lstStyle/>
+          <a:p>
+            <a:pPr algn="l" indent="0" marL="0">
+              <a:lnSpc>
+                <a:spcPts val="2447"/>
+              </a:lnSpc>
+              <a:buNone/>
+            </a:pPr>
+            <a:r>
+              <a:rPr lang="en-US" sz="1631" spc="-54" kern="0" dirty="0">
+                <a:solidFill>
+                  <a:srgbClr val="38BDF8"/>
+                </a:solidFill>
+                <a:latin typeface="Consolas" pitchFamily="34" charset="0"/>
+                <a:ea typeface="Consolas" pitchFamily="34" charset="-122"/>
+                <a:cs typeface="Consolas" pitchFamily="34" charset="-120"/>
+              </a:rPr>
+              <a:t>── [OUT]</a:t>
+            </a:r>
+            <a:endParaRPr lang="en-US" sz="1631" dirty="0"/>
+          </a:p>
+        </p:txBody>
+      </p:sp>
+      <p:sp>
+        <p:nvSpPr>
+          <p:cNvPr id="23" name="Text 21"/>
+          <p:cNvSpPr txBox="1"/>
+          <p:nvPr/>
+        </p:nvSpPr>
+        <p:spPr>
+          <a:xfrm>
+            <a:off x="838230" y="5729813"/>
+            <a:ext cx="1416954" cy="310805"/>
+          </a:xfrm>
+          <a:prstGeom prst="rect">
+            <a:avLst/>
+          </a:prstGeom>
+          <a:noFill/>
+          <a:ln/>
+        </p:spPr>
+        <p:txBody>
+          <a:bodyPr wrap="none" lIns="0" tIns="0" rIns="0" bIns="0" rtlCol="0" anchor="t"/>
+          <a:lstStyle/>
+          <a:p>
+            <a:pPr algn="l" indent="0" marL="0">
+              <a:lnSpc>
+                <a:spcPts val="2447"/>
+              </a:lnSpc>
+              <a:buNone/>
+            </a:pPr>
+            <a:r>
+              <a:rPr lang="en-US" sz="1631" spc="-54" kern="0" dirty="0">
+                <a:solidFill>
+                  <a:srgbClr val="38BDF8"/>
+                </a:solidFill>
+                <a:latin typeface="Consolas" pitchFamily="34" charset="0"/>
+                <a:ea typeface="Consolas" pitchFamily="34" charset="-122"/>
+                <a:cs typeface="Consolas" pitchFamily="34" charset="-120"/>
+              </a:rPr>
+              <a:t>|q1⟩ ──────</a:t>
+            </a:r>
+            <a:endParaRPr lang="en-US" sz="1631" dirty="0"/>
+          </a:p>
+        </p:txBody>
+      </p:sp>
+      <p:sp>
+        <p:nvSpPr>
+          <p:cNvPr id="24" name="Shape 22"/>
+          <p:cNvSpPr/>
+          <p:nvPr/>
+        </p:nvSpPr>
+        <p:spPr>
+          <a:xfrm>
+            <a:off x="2227844" y="5709056"/>
+            <a:ext cx="288859" cy="367955"/>
+          </a:xfrm>
+          <a:prstGeom prst="roundRect">
+            <a:avLst>
+              <a:gd name="adj" fmla="val 13200"/>
+            </a:avLst>
+          </a:prstGeom>
+          <a:solidFill>
+            <a:srgbClr val="1E293B"/>
+          </a:solidFill>
+          <a:ln w="9525">
+            <a:solidFill>
+              <a:srgbClr val="00F0FF"/>
+            </a:solidFill>
+            <a:prstDash val="solid"/>
+          </a:ln>
+        </p:spPr>
+      </p:sp>
+      <p:sp>
+        <p:nvSpPr>
+          <p:cNvPr id="25" name="Text 23"/>
+          <p:cNvSpPr txBox="1"/>
+          <p:nvPr/>
+        </p:nvSpPr>
+        <p:spPr>
+          <a:xfrm>
+            <a:off x="2294504" y="5729813"/>
+            <a:ext cx="193670" cy="310805"/>
+          </a:xfrm>
+          <a:prstGeom prst="rect">
+            <a:avLst/>
+          </a:prstGeom>
+          <a:noFill/>
+          <a:ln/>
+        </p:spPr>
+        <p:txBody>
+          <a:bodyPr wrap="none" lIns="0" tIns="0" rIns="0" bIns="0" rtlCol="0" anchor="t"/>
+          <a:lstStyle/>
+          <a:p>
+            <a:pPr algn="l" indent="0" marL="0">
+              <a:lnSpc>
+                <a:spcPts val="2447"/>
+              </a:lnSpc>
+              <a:buNone/>
+            </a:pPr>
+            <a:r>
+              <a:rPr lang="en-US" sz="1631" b="1" spc="-54" kern="0" dirty="0">
+                <a:solidFill>
+                  <a:srgbClr val="FFFFFF"/>
+                </a:solidFill>
+                <a:latin typeface="Consolas" pitchFamily="34" charset="0"/>
+                <a:ea typeface="Consolas" pitchFamily="34" charset="-122"/>
+                <a:cs typeface="Consolas" pitchFamily="34" charset="-120"/>
+              </a:rPr>
+              <a:t>X</a:t>
+            </a:r>
+            <a:endParaRPr lang="en-US" sz="1631" dirty="0"/>
+          </a:p>
+        </p:txBody>
+      </p:sp>
+      <p:sp>
+        <p:nvSpPr>
+          <p:cNvPr id="26" name="Text 24"/>
+          <p:cNvSpPr txBox="1"/>
+          <p:nvPr/>
+        </p:nvSpPr>
+        <p:spPr>
+          <a:xfrm>
+            <a:off x="2573853" y="5729813"/>
+            <a:ext cx="311902" cy="310805"/>
+          </a:xfrm>
+          <a:prstGeom prst="rect">
+            <a:avLst/>
+          </a:prstGeom>
+          <a:noFill/>
+          <a:ln/>
+        </p:spPr>
+        <p:txBody>
+          <a:bodyPr wrap="none" lIns="0" tIns="0" rIns="0" bIns="0" rtlCol="0" anchor="t"/>
+          <a:lstStyle/>
+          <a:p>
+            <a:pPr algn="l" indent="0" marL="0">
+              <a:lnSpc>
+                <a:spcPts val="2447"/>
+              </a:lnSpc>
+              <a:buNone/>
+            </a:pPr>
+            <a:r>
+              <a:rPr lang="en-US" sz="1631" spc="-54" kern="0" dirty="0">
+                <a:solidFill>
+                  <a:srgbClr val="38BDF8"/>
+                </a:solidFill>
+                <a:latin typeface="Consolas" pitchFamily="34" charset="0"/>
+                <a:ea typeface="Consolas" pitchFamily="34" charset="-122"/>
+                <a:cs typeface="Consolas" pitchFamily="34" charset="-120"/>
+              </a:rPr>
+              <a:t>──</a:t>
+            </a:r>
+            <a:endParaRPr lang="en-US" sz="1631" dirty="0"/>
+          </a:p>
+        </p:txBody>
+      </p:sp>
+      <p:sp>
+        <p:nvSpPr>
+          <p:cNvPr id="27" name="Shape 25"/>
+          <p:cNvSpPr/>
+          <p:nvPr/>
+        </p:nvSpPr>
+        <p:spPr>
+          <a:xfrm>
+            <a:off x="2904866" y="5709056"/>
+            <a:ext cx="406359" cy="367955"/>
+          </a:xfrm>
+          <a:prstGeom prst="roundRect">
+            <a:avLst>
+              <a:gd name="adj" fmla="val 10363"/>
+            </a:avLst>
+          </a:prstGeom>
+          <a:solidFill>
+            <a:srgbClr val="1E293B"/>
+          </a:solidFill>
+          <a:ln w="9525">
+            <a:solidFill>
+              <a:srgbClr val="00F0FF"/>
+            </a:solidFill>
+            <a:prstDash val="solid"/>
+          </a:ln>
+        </p:spPr>
+      </p:sp>
+      <p:sp>
+        <p:nvSpPr>
+          <p:cNvPr id="28" name="Text 26"/>
+          <p:cNvSpPr txBox="1"/>
+          <p:nvPr/>
+        </p:nvSpPr>
+        <p:spPr>
+          <a:xfrm>
+            <a:off x="2971526" y="5729813"/>
+            <a:ext cx="311079" cy="310805"/>
+          </a:xfrm>
+          <a:prstGeom prst="rect">
+            <a:avLst/>
+          </a:prstGeom>
+          <a:noFill/>
+          <a:ln/>
+        </p:spPr>
+        <p:txBody>
+          <a:bodyPr wrap="none" lIns="0" tIns="0" rIns="0" bIns="0" rtlCol="0" anchor="t"/>
+          <a:lstStyle/>
+          <a:p>
+            <a:pPr algn="l" indent="0" marL="0">
+              <a:lnSpc>
+                <a:spcPts val="2447"/>
+              </a:lnSpc>
+              <a:buNone/>
+            </a:pPr>
+            <a:r>
+              <a:rPr lang="en-US" sz="1631" b="1" spc="-54" kern="0" dirty="0">
+                <a:solidFill>
+                  <a:srgbClr val="FFFFFF"/>
+                </a:solidFill>
+                <a:latin typeface="Consolas" pitchFamily="34" charset="0"/>
+                <a:ea typeface="Consolas" pitchFamily="34" charset="-122"/>
+                <a:cs typeface="Consolas" pitchFamily="34" charset="-120"/>
+              </a:rPr>
+              <a:t>RZ</a:t>
+            </a:r>
+            <a:endParaRPr lang="en-US" sz="1631" dirty="0"/>
+          </a:p>
+        </p:txBody>
+      </p:sp>
+      <p:sp>
+        <p:nvSpPr>
+          <p:cNvPr id="29" name="Text 27"/>
+          <p:cNvSpPr txBox="1"/>
+          <p:nvPr/>
+        </p:nvSpPr>
+        <p:spPr>
+          <a:xfrm>
+            <a:off x="3368284" y="5729813"/>
+            <a:ext cx="311902" cy="310805"/>
+          </a:xfrm>
+          <a:prstGeom prst="rect">
+            <a:avLst/>
+          </a:prstGeom>
+          <a:noFill/>
+          <a:ln/>
+        </p:spPr>
+        <p:txBody>
+          <a:bodyPr wrap="none" lIns="0" tIns="0" rIns="0" bIns="0" rtlCol="0" anchor="t"/>
+          <a:lstStyle/>
+          <a:p>
+            <a:pPr algn="l" indent="0" marL="0">
+              <a:lnSpc>
+                <a:spcPts val="2447"/>
+              </a:lnSpc>
+              <a:buNone/>
+            </a:pPr>
+            <a:r>
+              <a:rPr lang="en-US" sz="1631" spc="-54" kern="0" dirty="0">
+                <a:solidFill>
+                  <a:srgbClr val="38BDF8"/>
+                </a:solidFill>
+                <a:latin typeface="Consolas" pitchFamily="34" charset="0"/>
+                <a:ea typeface="Consolas" pitchFamily="34" charset="-122"/>
+                <a:cs typeface="Consolas" pitchFamily="34" charset="-120"/>
+              </a:rPr>
+              <a:t>──</a:t>
+            </a:r>
+            <a:endParaRPr lang="en-US" sz="1631" dirty="0"/>
+          </a:p>
+        </p:txBody>
+      </p:sp>
+      <p:sp>
+        <p:nvSpPr>
+          <p:cNvPr id="30" name="Shape 28"/>
+          <p:cNvSpPr/>
+          <p:nvPr/>
+        </p:nvSpPr>
+        <p:spPr>
+          <a:xfrm>
+            <a:off x="3699297" y="5709056"/>
+            <a:ext cx="289408" cy="367955"/>
+          </a:xfrm>
+          <a:prstGeom prst="roundRect">
+            <a:avLst>
+              <a:gd name="adj" fmla="val 13175"/>
+            </a:avLst>
+          </a:prstGeom>
+          <a:solidFill>
+            <a:srgbClr val="1E293B"/>
+          </a:solidFill>
+          <a:ln w="9525">
+            <a:solidFill>
+              <a:srgbClr val="00F0FF"/>
+            </a:solidFill>
+            <a:prstDash val="solid"/>
+          </a:ln>
+        </p:spPr>
+      </p:sp>
+      <p:sp>
+        <p:nvSpPr>
+          <p:cNvPr id="31" name="Text 29"/>
+          <p:cNvSpPr txBox="1"/>
+          <p:nvPr/>
+        </p:nvSpPr>
+        <p:spPr>
+          <a:xfrm>
+            <a:off x="3765956" y="5729813"/>
+            <a:ext cx="194127" cy="310805"/>
+          </a:xfrm>
+          <a:prstGeom prst="rect">
+            <a:avLst/>
+          </a:prstGeom>
+          <a:noFill/>
+          <a:ln/>
+        </p:spPr>
+        <p:txBody>
+          <a:bodyPr wrap="none" lIns="0" tIns="0" rIns="0" bIns="0" rtlCol="0" anchor="t"/>
+          <a:lstStyle/>
+          <a:p>
+            <a:pPr algn="l" indent="0" marL="0">
+              <a:lnSpc>
+                <a:spcPts val="2447"/>
+              </a:lnSpc>
+              <a:buNone/>
+            </a:pPr>
+            <a:r>
+              <a:rPr lang="en-US" sz="1631" b="1" spc="-54" kern="0" dirty="0">
+                <a:solidFill>
+                  <a:srgbClr val="FFFFFF"/>
+                </a:solidFill>
+                <a:latin typeface="Consolas" pitchFamily="34" charset="0"/>
+                <a:ea typeface="Consolas" pitchFamily="34" charset="-122"/>
+                <a:cs typeface="Consolas" pitchFamily="34" charset="-120"/>
+              </a:rPr>
+              <a:t>●</a:t>
+            </a:r>
+            <a:endParaRPr lang="en-US" sz="1631" dirty="0"/>
+          </a:p>
+        </p:txBody>
+      </p:sp>
+      <p:sp>
+        <p:nvSpPr>
+          <p:cNvPr id="32" name="Text 30"/>
+          <p:cNvSpPr txBox="1"/>
+          <p:nvPr/>
+        </p:nvSpPr>
+        <p:spPr>
+          <a:xfrm>
+            <a:off x="4045763" y="5729813"/>
+            <a:ext cx="1034369" cy="310805"/>
+          </a:xfrm>
+          <a:prstGeom prst="rect">
+            <a:avLst/>
+          </a:prstGeom>
+          <a:noFill/>
+          <a:ln/>
+        </p:spPr>
+        <p:txBody>
+          <a:bodyPr wrap="none" lIns="0" tIns="0" rIns="0" bIns="0" rtlCol="0" anchor="t"/>
+          <a:lstStyle/>
+          <a:p>
+            <a:pPr algn="l" indent="0" marL="0">
+              <a:lnSpc>
+                <a:spcPts val="2447"/>
+              </a:lnSpc>
+              <a:buNone/>
+            </a:pPr>
+            <a:r>
+              <a:rPr lang="en-US" sz="1631" spc="-54" kern="0" dirty="0">
+                <a:solidFill>
+                  <a:srgbClr val="38BDF8"/>
+                </a:solidFill>
+                <a:latin typeface="Consolas" pitchFamily="34" charset="0"/>
+                <a:ea typeface="Consolas" pitchFamily="34" charset="-122"/>
+                <a:cs typeface="Consolas" pitchFamily="34" charset="-120"/>
+              </a:rPr>
+              <a:t>── [OUT]</a:t>
+            </a:r>
+            <a:endParaRPr lang="en-US" sz="1631" dirty="0"/>
+          </a:p>
+        </p:txBody>
+      </p:sp>
+      <p:sp>
+        <p:nvSpPr>
+          <p:cNvPr id="33" name="Shape 31"/>
+          <p:cNvSpPr/>
+          <p:nvPr/>
+        </p:nvSpPr>
+        <p:spPr>
+          <a:xfrm>
+            <a:off x="6654455" y="4754240"/>
+            <a:ext cx="4823094" cy="1522842"/>
+          </a:xfrm>
+          <a:prstGeom prst="roundRect">
+            <a:avLst>
+              <a:gd name="adj" fmla="val 3753"/>
+            </a:avLst>
+          </a:prstGeom>
+          <a:solidFill>
+            <a:srgbClr val="0E1626"/>
+          </a:solidFill>
+          <a:ln/>
+        </p:spPr>
+      </p:sp>
+      <p:sp>
+        <p:nvSpPr>
+          <p:cNvPr id="34" name="Text 32"/>
+          <p:cNvSpPr txBox="1"/>
+          <p:nvPr/>
+        </p:nvSpPr>
+        <p:spPr>
+          <a:xfrm>
+            <a:off x="6768755" y="4886188"/>
+            <a:ext cx="4939955" cy="164592"/>
+          </a:xfrm>
+          <a:prstGeom prst="rect">
+            <a:avLst/>
+          </a:prstGeom>
+          <a:noFill/>
+          <a:ln/>
+        </p:spPr>
+        <p:txBody>
+          <a:bodyPr wrap="none" lIns="0" tIns="0" rIns="0" bIns="0" rtlCol="0" anchor="t"/>
+          <a:lstStyle/>
+          <a:p>
+            <a:pPr algn="l" indent="0" marL="0">
+              <a:lnSpc>
+                <a:spcPts val="1296"/>
+              </a:lnSpc>
+              <a:buNone/>
+            </a:pPr>
+            <a:r>
+              <a:rPr lang="en-US" sz="864" spc="-54" kern="0" dirty="0">
+                <a:solidFill>
+                  <a:srgbClr val="38BDF8"/>
+                </a:solidFill>
+                <a:latin typeface="Consolas" pitchFamily="34" charset="0"/>
+                <a:ea typeface="Consolas" pitchFamily="34" charset="-122"/>
+                <a:cs typeface="Consolas" pitchFamily="34" charset="-120"/>
+              </a:rPr>
+              <a:t>BENCHMARK STATUS</a:t>
+            </a:r>
+            <a:endParaRPr lang="en-US" sz="864" dirty="0"/>
+          </a:p>
+        </p:txBody>
+      </p:sp>
+      <p:sp>
+        <p:nvSpPr>
+          <p:cNvPr id="35" name="Text 33"/>
+          <p:cNvSpPr txBox="1"/>
+          <p:nvPr/>
+        </p:nvSpPr>
+        <p:spPr>
+          <a:xfrm>
+            <a:off x="6768755" y="5300777"/>
+            <a:ext cx="4939955" cy="411480"/>
+          </a:xfrm>
+          <a:prstGeom prst="rect">
+            <a:avLst/>
+          </a:prstGeom>
+          <a:noFill/>
+          <a:ln/>
+        </p:spPr>
+        <p:txBody>
+          <a:bodyPr wrap="none" lIns="0" tIns="0" rIns="0" bIns="0" rtlCol="0" anchor="t"/>
+          <a:lstStyle/>
+          <a:p>
+            <a:pPr algn="l" indent="0" marL="0">
+              <a:lnSpc>
+                <a:spcPts val="3240"/>
+              </a:lnSpc>
+              <a:buNone/>
+            </a:pPr>
+            <a:r>
+              <a:rPr lang="en-US" sz="2160" b="1" spc="-54" kern="0" dirty="0">
+                <a:solidFill>
+                  <a:srgbClr val="00F0FF"/>
+                </a:solidFill>
+                <a:latin typeface="Consolas" pitchFamily="34" charset="0"/>
+                <a:ea typeface="Consolas" pitchFamily="34" charset="-122"/>
+                <a:cs typeface="Consolas" pitchFamily="34" charset="-120"/>
+              </a:rPr>
+              <a:t>1,200x SPEEDUP</a:t>
+            </a:r>
+            <a:endParaRPr lang="en-US" sz="2160" dirty="0"/>
+          </a:p>
+        </p:txBody>
+      </p:sp>
+      <p:sp>
+        <p:nvSpPr>
+          <p:cNvPr id="36" name="Text 34"/>
+          <p:cNvSpPr txBox="1"/>
+          <p:nvPr/>
+        </p:nvSpPr>
+        <p:spPr>
+          <a:xfrm>
+            <a:off x="6768755" y="5972221"/>
+            <a:ext cx="4939955" cy="171450"/>
+          </a:xfrm>
+          <a:prstGeom prst="rect">
+            <a:avLst/>
+          </a:prstGeom>
+          <a:noFill/>
+          <a:ln/>
+        </p:spPr>
+        <p:txBody>
+          <a:bodyPr wrap="none" lIns="0" tIns="0" rIns="0" bIns="0" rtlCol="0" anchor="t"/>
+          <a:lstStyle/>
+          <a:p>
+            <a:pPr algn="l" indent="0" marL="0">
+              <a:lnSpc>
+                <a:spcPts val="1350"/>
+              </a:lnSpc>
+              <a:buNone/>
+            </a:pPr>
+            <a:r>
+              <a:rPr lang="en-US" sz="900" spc="-54" kern="0" dirty="0">
+                <a:solidFill>
+                  <a:srgbClr val="94A3B8"/>
+                </a:solidFill>
+                <a:latin typeface="Malgun Gothic" pitchFamily="34" charset="0"/>
+                <a:ea typeface="Malgun Gothic" pitchFamily="34" charset="-122"/>
+                <a:cs typeface="Malgun Gothic" pitchFamily="34" charset="-120"/>
+              </a:rPr>
+              <a:t>Classical HPC Supercomputer 대비</a:t>
+            </a:r>
+            <a:endParaRPr lang="en-US" sz="900" dirty="0"/>
+          </a:p>
+        </p:txBody>
+      </p:sp>
     </p:spTree>
   </p:cSld>
   <p:clrMapOvr>
@@ -986,16 +2252,9 @@
   <p:cSld name="Slide 2">
     <p:bg>
       <p:bgPr>
-        <a:blipFill dpi="0" rotWithShape="1">
-          <a:blip r:embed="rId1">
-            <a:lum/>
-          </a:blip>
-          <a:srcRect/>
-          <a:stretch>
-            <a:fillRect/>
-          </a:stretch>
-        </a:blipFill>
-        <a:effectLst/>
+        <a:solidFill>
+          <a:srgbClr val="050811"/>
+        </a:solidFill>
       </p:bgPr>
     </p:bg>
     <p:spTree>
@@ -1012,6 +2271,1486 @@
           <a:chExt cx="0" cy="0"/>
         </a:xfrm>
       </p:grpSpPr>
+      <p:sp>
+        <p:nvSpPr>
+          <p:cNvPr id="2" name="Shape 0"/>
+          <p:cNvSpPr/>
+          <p:nvPr/>
+        </p:nvSpPr>
+        <p:spPr>
+          <a:xfrm>
+            <a:off x="476220" y="381030"/>
+            <a:ext cx="11239530" cy="482255"/>
+          </a:xfrm>
+          <a:prstGeom prst="roundRect">
+            <a:avLst>
+              <a:gd name="adj" fmla="val 15794"/>
+            </a:avLst>
+          </a:prstGeom>
+          <a:solidFill>
+            <a:srgbClr val="0E1626"/>
+          </a:solidFill>
+          <a:ln w="9525">
+            <a:solidFill>
+              <a:srgbClr val="1E293B"/>
+            </a:solidFill>
+            <a:prstDash val="solid"/>
+          </a:ln>
+        </p:spPr>
+      </p:sp>
+      <p:sp>
+        <p:nvSpPr>
+          <p:cNvPr id="3" name="Shape 1"/>
+          <p:cNvSpPr/>
+          <p:nvPr/>
+        </p:nvSpPr>
+        <p:spPr>
+          <a:xfrm>
+            <a:off x="638160" y="574426"/>
+            <a:ext cx="95280" cy="95280"/>
+          </a:xfrm>
+          <a:prstGeom prst="roundRect">
+            <a:avLst>
+              <a:gd name="adj" fmla="val 50000"/>
+            </a:avLst>
+          </a:prstGeom>
+          <a:solidFill>
+            <a:srgbClr val="EF4444"/>
+          </a:solidFill>
+          <a:ln/>
+        </p:spPr>
+      </p:sp>
+      <p:sp>
+        <p:nvSpPr>
+          <p:cNvPr id="4" name="Shape 2"/>
+          <p:cNvSpPr/>
+          <p:nvPr/>
+        </p:nvSpPr>
+        <p:spPr>
+          <a:xfrm>
+            <a:off x="790590" y="574426"/>
+            <a:ext cx="95280" cy="95280"/>
+          </a:xfrm>
+          <a:prstGeom prst="roundRect">
+            <a:avLst>
+              <a:gd name="adj" fmla="val 50000"/>
+            </a:avLst>
+          </a:prstGeom>
+          <a:solidFill>
+            <a:srgbClr val="F59E0B"/>
+          </a:solidFill>
+          <a:ln/>
+        </p:spPr>
+      </p:sp>
+      <p:sp>
+        <p:nvSpPr>
+          <p:cNvPr id="5" name="Shape 3"/>
+          <p:cNvSpPr/>
+          <p:nvPr/>
+        </p:nvSpPr>
+        <p:spPr>
+          <a:xfrm>
+            <a:off x="943021" y="574426"/>
+            <a:ext cx="95280" cy="95280"/>
+          </a:xfrm>
+          <a:prstGeom prst="roundRect">
+            <a:avLst>
+              <a:gd name="adj" fmla="val 50000"/>
+            </a:avLst>
+          </a:prstGeom>
+          <a:solidFill>
+            <a:srgbClr val="10B981"/>
+          </a:solidFill>
+          <a:ln/>
+        </p:spPr>
+      </p:sp>
+      <p:sp>
+        <p:nvSpPr>
+          <p:cNvPr id="6" name="Text 4"/>
+          <p:cNvSpPr txBox="1"/>
+          <p:nvPr/>
+        </p:nvSpPr>
+        <p:spPr>
+          <a:xfrm>
+            <a:off x="1209660" y="459029"/>
+            <a:ext cx="7499634" cy="310805"/>
+          </a:xfrm>
+          <a:prstGeom prst="rect">
+            <a:avLst/>
+          </a:prstGeom>
+          <a:noFill/>
+          <a:ln/>
+        </p:spPr>
+        <p:txBody>
+          <a:bodyPr wrap="none" lIns="0" tIns="0" rIns="0" bIns="0" rtlCol="0" anchor="t"/>
+          <a:lstStyle/>
+          <a:p>
+            <a:pPr algn="l" indent="0" marL="0">
+              <a:lnSpc>
+                <a:spcPts val="2447"/>
+              </a:lnSpc>
+              <a:buNone/>
+            </a:pPr>
+            <a:r>
+              <a:rPr lang="en-US" sz="1631" spc="-54" kern="0" dirty="0">
+                <a:solidFill>
+                  <a:srgbClr val="38BDF8"/>
+                </a:solidFill>
+                <a:latin typeface="Consolas" pitchFamily="34" charset="0"/>
+                <a:ea typeface="Consolas" pitchFamily="34" charset="-122"/>
+                <a:cs typeface="Consolas" pitchFamily="34" charset="-120"/>
+              </a:rPr>
+              <a:t>root@quantum-hpc:~# qgpu-bench --compare classical_baseline</a:t>
+            </a:r>
+            <a:endParaRPr lang="en-US" sz="1631" dirty="0"/>
+          </a:p>
+        </p:txBody>
+      </p:sp>
+      <p:sp>
+        <p:nvSpPr>
+          <p:cNvPr id="7" name="Shape 5"/>
+          <p:cNvSpPr/>
+          <p:nvPr/>
+        </p:nvSpPr>
+        <p:spPr>
+          <a:xfrm>
+            <a:off x="476220" y="996605"/>
+            <a:ext cx="11239530" cy="5480456"/>
+          </a:xfrm>
+          <a:prstGeom prst="roundRect">
+            <a:avLst>
+              <a:gd name="adj" fmla="val 1390"/>
+            </a:avLst>
+          </a:prstGeom>
+          <a:solidFill>
+            <a:srgbClr val="080D1A"/>
+          </a:solidFill>
+          <a:ln w="9525">
+            <a:solidFill>
+              <a:srgbClr val="1E293B"/>
+            </a:solidFill>
+            <a:prstDash val="solid"/>
+          </a:ln>
+        </p:spPr>
+      </p:sp>
+      <p:sp>
+        <p:nvSpPr>
+          <p:cNvPr id="8" name="Text 6"/>
+          <p:cNvSpPr txBox="1"/>
+          <p:nvPr/>
+        </p:nvSpPr>
+        <p:spPr>
+          <a:xfrm>
+            <a:off x="695310" y="1193383"/>
+            <a:ext cx="11643330" cy="339791"/>
+          </a:xfrm>
+          <a:prstGeom prst="rect">
+            <a:avLst/>
+          </a:prstGeom>
+          <a:noFill/>
+          <a:ln/>
+        </p:spPr>
+        <p:txBody>
+          <a:bodyPr wrap="none" lIns="0" tIns="0" rIns="0" bIns="0" rtlCol="0" anchor="t"/>
+          <a:lstStyle/>
+          <a:p>
+            <a:pPr algn="l" indent="0" marL="0">
+              <a:lnSpc>
+                <a:spcPts val="2675"/>
+              </a:lnSpc>
+              <a:buNone/>
+            </a:pPr>
+            <a:r>
+              <a:rPr lang="en-US" sz="1784" b="1" spc="-54" kern="0" dirty="0">
+                <a:solidFill>
+                  <a:srgbClr val="00F0FF"/>
+                </a:solidFill>
+                <a:latin typeface="Consolas" pitchFamily="34" charset="0"/>
+                <a:ea typeface="Consolas" pitchFamily="34" charset="-122"/>
+                <a:cs typeface="Consolas" pitchFamily="34" charset="-120"/>
+              </a:rPr>
+              <a:t>[ANALYSIS] HARDWARE REGISTER &amp; PERFORMANCE TABLE</a:t>
+            </a:r>
+            <a:endParaRPr lang="en-US" sz="1784" dirty="0"/>
+          </a:p>
+        </p:txBody>
+      </p:sp>
+      <p:sp>
+        <p:nvSpPr>
+          <p:cNvPr id="9" name="Text 7"/>
+          <p:cNvSpPr txBox="1"/>
+          <p:nvPr/>
+        </p:nvSpPr>
+        <p:spPr>
+          <a:xfrm>
+            <a:off x="695310" y="1569750"/>
+            <a:ext cx="11643330" cy="285750"/>
+          </a:xfrm>
+          <a:prstGeom prst="rect">
+            <a:avLst/>
+          </a:prstGeom>
+          <a:noFill/>
+          <a:ln/>
+        </p:spPr>
+        <p:txBody>
+          <a:bodyPr wrap="none" lIns="0" tIns="0" rIns="0" bIns="0" rtlCol="0" anchor="t"/>
+          <a:lstStyle/>
+          <a:p>
+            <a:pPr algn="l" indent="0" marL="0">
+              <a:lnSpc>
+                <a:spcPts val="2250"/>
+              </a:lnSpc>
+              <a:buNone/>
+            </a:pPr>
+            <a:r>
+              <a:rPr lang="en-US" sz="1800" b="1" spc="-54" kern="0" dirty="0">
+                <a:solidFill>
+                  <a:srgbClr val="FFFFFF"/>
+                </a:solidFill>
+                <a:latin typeface="Malgun Gothic" pitchFamily="34" charset="0"/>
+                <a:ea typeface="Malgun Gothic" pitchFamily="34" charset="-122"/>
+                <a:cs typeface="Malgun Gothic" pitchFamily="34" charset="-120"/>
+              </a:rPr>
+              <a:t>분산 양자 시뮬레이션 지표 비교표</a:t>
+            </a:r>
+            <a:endParaRPr lang="en-US" sz="1800" dirty="0"/>
+          </a:p>
+        </p:txBody>
+      </p:sp>
+      <p:sp>
+        <p:nvSpPr>
+          <p:cNvPr id="10" name="Shape 8"/>
+          <p:cNvSpPr/>
+          <p:nvPr/>
+        </p:nvSpPr>
+        <p:spPr>
+          <a:xfrm>
+            <a:off x="719176" y="3240085"/>
+            <a:ext cx="5180716" cy="9510"/>
+          </a:xfrm>
+          <a:prstGeom prst="rect">
+            <a:avLst/>
+          </a:prstGeom>
+          <a:solidFill>
+            <a:srgbClr val="D1D9E0">
+              <a:alpha val="70000"/>
+            </a:srgbClr>
+          </a:solidFill>
+          <a:ln/>
+        </p:spPr>
+      </p:sp>
+      <p:sp>
+        <p:nvSpPr>
+          <p:cNvPr id="11" name="Shape 9"/>
+          <p:cNvSpPr/>
+          <p:nvPr/>
+        </p:nvSpPr>
+        <p:spPr>
+          <a:xfrm>
+            <a:off x="719176" y="3604199"/>
+            <a:ext cx="5180716" cy="19020"/>
+          </a:xfrm>
+          <a:prstGeom prst="rect">
+            <a:avLst/>
+          </a:prstGeom>
+          <a:solidFill>
+            <a:srgbClr val="00F0FF"/>
+          </a:solidFill>
+          <a:ln/>
+        </p:spPr>
+      </p:sp>
+      <p:sp>
+        <p:nvSpPr>
+          <p:cNvPr id="12" name="Shape 10"/>
+          <p:cNvSpPr/>
+          <p:nvPr/>
+        </p:nvSpPr>
+        <p:spPr>
+          <a:xfrm>
+            <a:off x="719176" y="3240085"/>
+            <a:ext cx="1166317" cy="383134"/>
+          </a:xfrm>
+          <a:prstGeom prst="rect">
+            <a:avLst/>
+          </a:prstGeom>
+          <a:ln w="9525">
+            <a:solidFill>
+              <a:srgbClr val="1E293B"/>
+            </a:solidFill>
+            <a:prstDash val="solid"/>
+          </a:ln>
+        </p:spPr>
+      </p:sp>
+      <p:sp>
+        <p:nvSpPr>
+          <p:cNvPr id="13" name="Text 11"/>
+          <p:cNvSpPr txBox="1"/>
+          <p:nvPr/>
+        </p:nvSpPr>
+        <p:spPr>
+          <a:xfrm>
+            <a:off x="804855" y="3331982"/>
+            <a:ext cx="1052383" cy="178308"/>
+          </a:xfrm>
+          <a:prstGeom prst="rect">
+            <a:avLst/>
+          </a:prstGeom>
+          <a:noFill/>
+          <a:ln/>
+        </p:spPr>
+        <p:txBody>
+          <a:bodyPr wrap="none" lIns="0" tIns="0" rIns="0" bIns="0" rtlCol="0" anchor="t"/>
+          <a:lstStyle/>
+          <a:p>
+            <a:pPr algn="l" indent="0" marL="0">
+              <a:lnSpc>
+                <a:spcPts val="1404"/>
+              </a:lnSpc>
+              <a:buNone/>
+            </a:pPr>
+            <a:r>
+              <a:rPr lang="en-US" sz="936" b="1" spc="-54" kern="0" dirty="0">
+                <a:solidFill>
+                  <a:srgbClr val="38BDF8"/>
+                </a:solidFill>
+                <a:latin typeface="Consolas" pitchFamily="34" charset="0"/>
+                <a:ea typeface="Consolas" pitchFamily="34" charset="-122"/>
+                <a:cs typeface="Consolas" pitchFamily="34" charset="-120"/>
+              </a:rPr>
+              <a:t>METRIC</a:t>
+            </a:r>
+            <a:endParaRPr lang="en-US" sz="936" dirty="0"/>
+          </a:p>
+        </p:txBody>
+      </p:sp>
+      <p:sp>
+        <p:nvSpPr>
+          <p:cNvPr id="14" name="Shape 12"/>
+          <p:cNvSpPr/>
+          <p:nvPr/>
+        </p:nvSpPr>
+        <p:spPr>
+          <a:xfrm>
+            <a:off x="1885493" y="3240085"/>
+            <a:ext cx="1166317" cy="383134"/>
+          </a:xfrm>
+          <a:prstGeom prst="rect">
+            <a:avLst/>
+          </a:prstGeom>
+          <a:ln w="9525">
+            <a:solidFill>
+              <a:srgbClr val="1E293B"/>
+            </a:solidFill>
+            <a:prstDash val="solid"/>
+          </a:ln>
+        </p:spPr>
+      </p:sp>
+      <p:sp>
+        <p:nvSpPr>
+          <p:cNvPr id="15" name="Text 13"/>
+          <p:cNvSpPr txBox="1"/>
+          <p:nvPr/>
+        </p:nvSpPr>
+        <p:spPr>
+          <a:xfrm>
+            <a:off x="1971172" y="3331982"/>
+            <a:ext cx="1052383" cy="178308"/>
+          </a:xfrm>
+          <a:prstGeom prst="rect">
+            <a:avLst/>
+          </a:prstGeom>
+          <a:noFill/>
+          <a:ln/>
+        </p:spPr>
+        <p:txBody>
+          <a:bodyPr wrap="none" lIns="0" tIns="0" rIns="0" bIns="0" rtlCol="0" anchor="t"/>
+          <a:lstStyle/>
+          <a:p>
+            <a:pPr algn="l" indent="0" marL="0">
+              <a:lnSpc>
+                <a:spcPts val="1404"/>
+              </a:lnSpc>
+              <a:buNone/>
+            </a:pPr>
+            <a:r>
+              <a:rPr lang="en-US" sz="936" b="1" spc="-54" kern="0" dirty="0">
+                <a:solidFill>
+                  <a:srgbClr val="94A3B8"/>
+                </a:solidFill>
+                <a:latin typeface="Consolas" pitchFamily="34" charset="0"/>
+                <a:ea typeface="Consolas" pitchFamily="34" charset="-122"/>
+                <a:cs typeface="Consolas" pitchFamily="34" charset="-120"/>
+              </a:rPr>
+              <a:t>CLASSICAL HPC</a:t>
+            </a:r>
+            <a:endParaRPr lang="en-US" sz="936" dirty="0"/>
+          </a:p>
+        </p:txBody>
+      </p:sp>
+      <p:sp>
+        <p:nvSpPr>
+          <p:cNvPr id="16" name="Shape 14"/>
+          <p:cNvSpPr/>
+          <p:nvPr/>
+        </p:nvSpPr>
+        <p:spPr>
+          <a:xfrm>
+            <a:off x="3051901" y="3240085"/>
+            <a:ext cx="1166317" cy="383134"/>
+          </a:xfrm>
+          <a:prstGeom prst="rect">
+            <a:avLst/>
+          </a:prstGeom>
+          <a:ln w="9525">
+            <a:solidFill>
+              <a:srgbClr val="1E293B"/>
+            </a:solidFill>
+            <a:prstDash val="solid"/>
+          </a:ln>
+        </p:spPr>
+      </p:sp>
+      <p:sp>
+        <p:nvSpPr>
+          <p:cNvPr id="17" name="Text 15"/>
+          <p:cNvSpPr txBox="1"/>
+          <p:nvPr/>
+        </p:nvSpPr>
+        <p:spPr>
+          <a:xfrm>
+            <a:off x="3137672" y="3331982"/>
+            <a:ext cx="1052383" cy="178308"/>
+          </a:xfrm>
+          <a:prstGeom prst="rect">
+            <a:avLst/>
+          </a:prstGeom>
+          <a:noFill/>
+          <a:ln/>
+        </p:spPr>
+        <p:txBody>
+          <a:bodyPr wrap="none" lIns="0" tIns="0" rIns="0" bIns="0" rtlCol="0" anchor="t"/>
+          <a:lstStyle/>
+          <a:p>
+            <a:pPr algn="l" indent="0" marL="0">
+              <a:lnSpc>
+                <a:spcPts val="1404"/>
+              </a:lnSpc>
+              <a:buNone/>
+            </a:pPr>
+            <a:r>
+              <a:rPr lang="en-US" sz="936" b="1" spc="-54" kern="0" dirty="0">
+                <a:solidFill>
+                  <a:srgbClr val="A78BFA"/>
+                </a:solidFill>
+                <a:latin typeface="Consolas" pitchFamily="34" charset="0"/>
+                <a:ea typeface="Consolas" pitchFamily="34" charset="-122"/>
+                <a:cs typeface="Consolas" pitchFamily="34" charset="-120"/>
+              </a:rPr>
+              <a:t>NISQ STANDALONE</a:t>
+            </a:r>
+            <a:endParaRPr lang="en-US" sz="936" dirty="0"/>
+          </a:p>
+        </p:txBody>
+      </p:sp>
+      <p:sp>
+        <p:nvSpPr>
+          <p:cNvPr id="18" name="Shape 16"/>
+          <p:cNvSpPr/>
+          <p:nvPr/>
+        </p:nvSpPr>
+        <p:spPr>
+          <a:xfrm>
+            <a:off x="4218219" y="3240085"/>
+            <a:ext cx="1681673" cy="383134"/>
+          </a:xfrm>
+          <a:prstGeom prst="rect">
+            <a:avLst/>
+          </a:prstGeom>
+          <a:ln w="9525">
+            <a:solidFill>
+              <a:srgbClr val="1E293B"/>
+            </a:solidFill>
+            <a:prstDash val="solid"/>
+          </a:ln>
+        </p:spPr>
+      </p:sp>
+      <p:sp>
+        <p:nvSpPr>
+          <p:cNvPr id="19" name="Text 17"/>
+          <p:cNvSpPr txBox="1"/>
+          <p:nvPr/>
+        </p:nvSpPr>
+        <p:spPr>
+          <a:xfrm>
+            <a:off x="4303989" y="3331982"/>
+            <a:ext cx="1608887" cy="178308"/>
+          </a:xfrm>
+          <a:prstGeom prst="rect">
+            <a:avLst/>
+          </a:prstGeom>
+          <a:noFill/>
+          <a:ln/>
+        </p:spPr>
+        <p:txBody>
+          <a:bodyPr wrap="none" lIns="0" tIns="0" rIns="0" bIns="0" rtlCol="0" anchor="t"/>
+          <a:lstStyle/>
+          <a:p>
+            <a:pPr algn="l" indent="0" marL="0">
+              <a:lnSpc>
+                <a:spcPts val="1404"/>
+              </a:lnSpc>
+              <a:buNone/>
+            </a:pPr>
+            <a:r>
+              <a:rPr lang="en-US" sz="936" b="1" spc="-54" kern="0" dirty="0">
+                <a:solidFill>
+                  <a:srgbClr val="00F0FF"/>
+                </a:solidFill>
+                <a:latin typeface="Consolas" pitchFamily="34" charset="0"/>
+                <a:ea typeface="Consolas" pitchFamily="34" charset="-122"/>
+                <a:cs typeface="Consolas" pitchFamily="34" charset="-120"/>
+              </a:rPr>
+              <a:t>Q-GPU HYBRID (OURS)</a:t>
+            </a:r>
+            <a:endParaRPr lang="en-US" sz="936" dirty="0"/>
+          </a:p>
+        </p:txBody>
+      </p:sp>
+      <p:sp>
+        <p:nvSpPr>
+          <p:cNvPr id="20" name="Shape 18"/>
+          <p:cNvSpPr/>
+          <p:nvPr/>
+        </p:nvSpPr>
+        <p:spPr>
+          <a:xfrm>
+            <a:off x="719176" y="3623219"/>
+            <a:ext cx="5180716" cy="9510"/>
+          </a:xfrm>
+          <a:prstGeom prst="rect">
+            <a:avLst/>
+          </a:prstGeom>
+          <a:solidFill>
+            <a:srgbClr val="D1D9E0">
+              <a:alpha val="70000"/>
+            </a:srgbClr>
+          </a:solidFill>
+          <a:ln/>
+        </p:spPr>
+      </p:sp>
+      <p:sp>
+        <p:nvSpPr>
+          <p:cNvPr id="21" name="Shape 19"/>
+          <p:cNvSpPr/>
+          <p:nvPr/>
+        </p:nvSpPr>
+        <p:spPr>
+          <a:xfrm>
+            <a:off x="719176" y="3996751"/>
+            <a:ext cx="5180716" cy="9510"/>
+          </a:xfrm>
+          <a:prstGeom prst="rect">
+            <a:avLst/>
+          </a:prstGeom>
+          <a:solidFill>
+            <a:srgbClr val="1E293B"/>
+          </a:solidFill>
+          <a:ln/>
+        </p:spPr>
+      </p:sp>
+      <p:sp>
+        <p:nvSpPr>
+          <p:cNvPr id="22" name="Shape 20"/>
+          <p:cNvSpPr/>
+          <p:nvPr/>
+        </p:nvSpPr>
+        <p:spPr>
+          <a:xfrm>
+            <a:off x="719176" y="3623219"/>
+            <a:ext cx="1166317" cy="383134"/>
+          </a:xfrm>
+          <a:prstGeom prst="rect">
+            <a:avLst/>
+          </a:prstGeom>
+          <a:ln w="9525">
+            <a:solidFill>
+              <a:srgbClr val="1E293B"/>
+            </a:solidFill>
+            <a:prstDash val="solid"/>
+          </a:ln>
+        </p:spPr>
+      </p:sp>
+      <p:sp>
+        <p:nvSpPr>
+          <p:cNvPr id="23" name="Text 21"/>
+          <p:cNvSpPr txBox="1"/>
+          <p:nvPr/>
+        </p:nvSpPr>
+        <p:spPr>
+          <a:xfrm>
+            <a:off x="804855" y="3719779"/>
+            <a:ext cx="1052383" cy="178308"/>
+          </a:xfrm>
+          <a:prstGeom prst="rect">
+            <a:avLst/>
+          </a:prstGeom>
+          <a:noFill/>
+          <a:ln/>
+        </p:spPr>
+        <p:txBody>
+          <a:bodyPr wrap="none" lIns="0" tIns="0" rIns="0" bIns="0" rtlCol="0" anchor="t"/>
+          <a:lstStyle/>
+          <a:p>
+            <a:pPr algn="l" indent="0" marL="0">
+              <a:lnSpc>
+                <a:spcPts val="1404"/>
+              </a:lnSpc>
+              <a:buNone/>
+            </a:pPr>
+            <a:r>
+              <a:rPr lang="en-US" sz="936" b="1" spc="-54" kern="0" dirty="0">
+                <a:solidFill>
+                  <a:srgbClr val="E2E8F0"/>
+                </a:solidFill>
+                <a:latin typeface="Consolas" pitchFamily="34" charset="0"/>
+                <a:ea typeface="Consolas" pitchFamily="34" charset="-122"/>
+                <a:cs typeface="Consolas" pitchFamily="34" charset="-120"/>
+              </a:rPr>
+              <a:t>Coherence Time</a:t>
+            </a:r>
+            <a:endParaRPr lang="en-US" sz="936" dirty="0"/>
+          </a:p>
+        </p:txBody>
+      </p:sp>
+      <p:sp>
+        <p:nvSpPr>
+          <p:cNvPr id="24" name="Shape 22"/>
+          <p:cNvSpPr/>
+          <p:nvPr/>
+        </p:nvSpPr>
+        <p:spPr>
+          <a:xfrm>
+            <a:off x="1885493" y="3623219"/>
+            <a:ext cx="1166317" cy="383134"/>
+          </a:xfrm>
+          <a:prstGeom prst="rect">
+            <a:avLst/>
+          </a:prstGeom>
+          <a:ln w="9525">
+            <a:solidFill>
+              <a:srgbClr val="1E293B"/>
+            </a:solidFill>
+            <a:prstDash val="solid"/>
+          </a:ln>
+        </p:spPr>
+      </p:sp>
+      <p:sp>
+        <p:nvSpPr>
+          <p:cNvPr id="25" name="Text 23"/>
+          <p:cNvSpPr txBox="1"/>
+          <p:nvPr/>
+        </p:nvSpPr>
+        <p:spPr>
+          <a:xfrm>
+            <a:off x="1971172" y="3719779"/>
+            <a:ext cx="1052383" cy="178308"/>
+          </a:xfrm>
+          <a:prstGeom prst="rect">
+            <a:avLst/>
+          </a:prstGeom>
+          <a:noFill/>
+          <a:ln/>
+        </p:spPr>
+        <p:txBody>
+          <a:bodyPr wrap="none" lIns="0" tIns="0" rIns="0" bIns="0" rtlCol="0" anchor="t"/>
+          <a:lstStyle/>
+          <a:p>
+            <a:pPr algn="l" indent="0" marL="0">
+              <a:lnSpc>
+                <a:spcPts val="1404"/>
+              </a:lnSpc>
+              <a:buNone/>
+            </a:pPr>
+            <a:r>
+              <a:rPr lang="en-US" sz="936" spc="-54" kern="0" dirty="0">
+                <a:solidFill>
+                  <a:srgbClr val="E2E8F0"/>
+                </a:solidFill>
+                <a:latin typeface="Consolas" pitchFamily="34" charset="0"/>
+                <a:ea typeface="Consolas" pitchFamily="34" charset="-122"/>
+                <a:cs typeface="Consolas" pitchFamily="34" charset="-120"/>
+              </a:rPr>
+              <a:t>N/A (Simulated)</a:t>
+            </a:r>
+            <a:endParaRPr lang="en-US" sz="936" dirty="0"/>
+          </a:p>
+        </p:txBody>
+      </p:sp>
+      <p:sp>
+        <p:nvSpPr>
+          <p:cNvPr id="26" name="Shape 24"/>
+          <p:cNvSpPr/>
+          <p:nvPr/>
+        </p:nvSpPr>
+        <p:spPr>
+          <a:xfrm>
+            <a:off x="3051901" y="3623219"/>
+            <a:ext cx="1166317" cy="383134"/>
+          </a:xfrm>
+          <a:prstGeom prst="rect">
+            <a:avLst/>
+          </a:prstGeom>
+          <a:ln w="9525">
+            <a:solidFill>
+              <a:srgbClr val="1E293B"/>
+            </a:solidFill>
+            <a:prstDash val="solid"/>
+          </a:ln>
+        </p:spPr>
+      </p:sp>
+      <p:sp>
+        <p:nvSpPr>
+          <p:cNvPr id="27" name="Text 25"/>
+          <p:cNvSpPr txBox="1"/>
+          <p:nvPr/>
+        </p:nvSpPr>
+        <p:spPr>
+          <a:xfrm>
+            <a:off x="3137672" y="3719779"/>
+            <a:ext cx="1052383" cy="178308"/>
+          </a:xfrm>
+          <a:prstGeom prst="rect">
+            <a:avLst/>
+          </a:prstGeom>
+          <a:noFill/>
+          <a:ln/>
+        </p:spPr>
+        <p:txBody>
+          <a:bodyPr wrap="none" lIns="0" tIns="0" rIns="0" bIns="0" rtlCol="0" anchor="t"/>
+          <a:lstStyle/>
+          <a:p>
+            <a:pPr algn="l" indent="0" marL="0">
+              <a:lnSpc>
+                <a:spcPts val="1404"/>
+              </a:lnSpc>
+              <a:buNone/>
+            </a:pPr>
+            <a:r>
+              <a:rPr lang="en-US" sz="936" spc="-54" kern="0" dirty="0">
+                <a:solidFill>
+                  <a:srgbClr val="E2E8F0"/>
+                </a:solidFill>
+                <a:latin typeface="Consolas" pitchFamily="34" charset="0"/>
+                <a:ea typeface="Consolas" pitchFamily="34" charset="-122"/>
+                <a:cs typeface="Consolas" pitchFamily="34" charset="-120"/>
+              </a:rPr>
+              <a:t>120 μs (Drift)</a:t>
+            </a:r>
+            <a:endParaRPr lang="en-US" sz="936" dirty="0"/>
+          </a:p>
+        </p:txBody>
+      </p:sp>
+      <p:sp>
+        <p:nvSpPr>
+          <p:cNvPr id="28" name="Shape 26"/>
+          <p:cNvSpPr/>
+          <p:nvPr/>
+        </p:nvSpPr>
+        <p:spPr>
+          <a:xfrm>
+            <a:off x="4218219" y="3623219"/>
+            <a:ext cx="1681673" cy="383134"/>
+          </a:xfrm>
+          <a:prstGeom prst="rect">
+            <a:avLst/>
+          </a:prstGeom>
+          <a:ln w="9525">
+            <a:solidFill>
+              <a:srgbClr val="1E293B"/>
+            </a:solidFill>
+            <a:prstDash val="solid"/>
+          </a:ln>
+        </p:spPr>
+      </p:sp>
+      <p:sp>
+        <p:nvSpPr>
+          <p:cNvPr id="29" name="Text 27"/>
+          <p:cNvSpPr txBox="1"/>
+          <p:nvPr/>
+        </p:nvSpPr>
+        <p:spPr>
+          <a:xfrm>
+            <a:off x="4303989" y="3719779"/>
+            <a:ext cx="1608887" cy="178308"/>
+          </a:xfrm>
+          <a:prstGeom prst="rect">
+            <a:avLst/>
+          </a:prstGeom>
+          <a:noFill/>
+          <a:ln/>
+        </p:spPr>
+        <p:txBody>
+          <a:bodyPr wrap="none" lIns="0" tIns="0" rIns="0" bIns="0" rtlCol="0" anchor="t"/>
+          <a:lstStyle/>
+          <a:p>
+            <a:pPr algn="l" indent="0" marL="0">
+              <a:lnSpc>
+                <a:spcPts val="1404"/>
+              </a:lnSpc>
+              <a:buNone/>
+            </a:pPr>
+            <a:r>
+              <a:rPr lang="en-US" sz="936" b="1" spc="-54" kern="0" dirty="0">
+                <a:solidFill>
+                  <a:srgbClr val="00F0FF"/>
+                </a:solidFill>
+                <a:latin typeface="Consolas" pitchFamily="34" charset="0"/>
+                <a:ea typeface="Consolas" pitchFamily="34" charset="-122"/>
+                <a:cs typeface="Consolas" pitchFamily="34" charset="-120"/>
+              </a:rPr>
+              <a:t>Infinite (Corrected)</a:t>
+            </a:r>
+            <a:endParaRPr lang="en-US" sz="936" dirty="0"/>
+          </a:p>
+        </p:txBody>
+      </p:sp>
+      <p:sp>
+        <p:nvSpPr>
+          <p:cNvPr id="30" name="Shape 28"/>
+          <p:cNvSpPr/>
+          <p:nvPr/>
+        </p:nvSpPr>
+        <p:spPr>
+          <a:xfrm>
+            <a:off x="719176" y="4006352"/>
+            <a:ext cx="5180716" cy="378379"/>
+          </a:xfrm>
+          <a:prstGeom prst="rect">
+            <a:avLst/>
+          </a:prstGeom>
+          <a:solidFill>
+            <a:srgbClr val="0B1220"/>
+          </a:solidFill>
+          <a:ln/>
+        </p:spPr>
+      </p:sp>
+      <p:sp>
+        <p:nvSpPr>
+          <p:cNvPr id="31" name="Shape 29"/>
+          <p:cNvSpPr/>
+          <p:nvPr/>
+        </p:nvSpPr>
+        <p:spPr>
+          <a:xfrm>
+            <a:off x="719176" y="4006352"/>
+            <a:ext cx="5180716" cy="9510"/>
+          </a:xfrm>
+          <a:prstGeom prst="rect">
+            <a:avLst/>
+          </a:prstGeom>
+          <a:solidFill>
+            <a:srgbClr val="D1D9E0">
+              <a:alpha val="70000"/>
+            </a:srgbClr>
+          </a:solidFill>
+          <a:ln/>
+        </p:spPr>
+      </p:sp>
+      <p:sp>
+        <p:nvSpPr>
+          <p:cNvPr id="32" name="Shape 30"/>
+          <p:cNvSpPr/>
+          <p:nvPr/>
+        </p:nvSpPr>
+        <p:spPr>
+          <a:xfrm>
+            <a:off x="719176" y="4375130"/>
+            <a:ext cx="5180716" cy="9510"/>
+          </a:xfrm>
+          <a:prstGeom prst="rect">
+            <a:avLst/>
+          </a:prstGeom>
+          <a:solidFill>
+            <a:srgbClr val="1E293B"/>
+          </a:solidFill>
+          <a:ln/>
+        </p:spPr>
+      </p:sp>
+      <p:sp>
+        <p:nvSpPr>
+          <p:cNvPr id="33" name="Shape 31"/>
+          <p:cNvSpPr/>
+          <p:nvPr/>
+        </p:nvSpPr>
+        <p:spPr>
+          <a:xfrm>
+            <a:off x="719176" y="4006352"/>
+            <a:ext cx="1166317" cy="378379"/>
+          </a:xfrm>
+          <a:prstGeom prst="rect">
+            <a:avLst/>
+          </a:prstGeom>
+          <a:ln w="9525">
+            <a:solidFill>
+              <a:srgbClr val="1E293B"/>
+            </a:solidFill>
+            <a:prstDash val="solid"/>
+          </a:ln>
+        </p:spPr>
+      </p:sp>
+      <p:sp>
+        <p:nvSpPr>
+          <p:cNvPr id="34" name="Text 32"/>
+          <p:cNvSpPr txBox="1"/>
+          <p:nvPr/>
+        </p:nvSpPr>
+        <p:spPr>
+          <a:xfrm>
+            <a:off x="804855" y="4098158"/>
+            <a:ext cx="1052383" cy="178308"/>
+          </a:xfrm>
+          <a:prstGeom prst="rect">
+            <a:avLst/>
+          </a:prstGeom>
+          <a:noFill/>
+          <a:ln/>
+        </p:spPr>
+        <p:txBody>
+          <a:bodyPr wrap="none" lIns="0" tIns="0" rIns="0" bIns="0" rtlCol="0" anchor="t"/>
+          <a:lstStyle/>
+          <a:p>
+            <a:pPr algn="l" indent="0" marL="0">
+              <a:lnSpc>
+                <a:spcPts val="1404"/>
+              </a:lnSpc>
+              <a:buNone/>
+            </a:pPr>
+            <a:r>
+              <a:rPr lang="en-US" sz="936" b="1" spc="-54" kern="0" dirty="0">
+                <a:solidFill>
+                  <a:srgbClr val="E2E8F0"/>
+                </a:solidFill>
+                <a:latin typeface="Consolas" pitchFamily="34" charset="0"/>
+                <a:ea typeface="Consolas" pitchFamily="34" charset="-122"/>
+                <a:cs typeface="Consolas" pitchFamily="34" charset="-120"/>
+              </a:rPr>
+              <a:t>Gate Error Rate</a:t>
+            </a:r>
+            <a:endParaRPr lang="en-US" sz="936" dirty="0"/>
+          </a:p>
+        </p:txBody>
+      </p:sp>
+      <p:sp>
+        <p:nvSpPr>
+          <p:cNvPr id="35" name="Shape 33"/>
+          <p:cNvSpPr/>
+          <p:nvPr/>
+        </p:nvSpPr>
+        <p:spPr>
+          <a:xfrm>
+            <a:off x="1885493" y="4006352"/>
+            <a:ext cx="1166317" cy="378379"/>
+          </a:xfrm>
+          <a:prstGeom prst="rect">
+            <a:avLst/>
+          </a:prstGeom>
+          <a:ln w="9525">
+            <a:solidFill>
+              <a:srgbClr val="1E293B"/>
+            </a:solidFill>
+            <a:prstDash val="solid"/>
+          </a:ln>
+        </p:spPr>
+      </p:sp>
+      <p:sp>
+        <p:nvSpPr>
+          <p:cNvPr id="36" name="Text 34"/>
+          <p:cNvSpPr txBox="1"/>
+          <p:nvPr/>
+        </p:nvSpPr>
+        <p:spPr>
+          <a:xfrm>
+            <a:off x="1971172" y="4098158"/>
+            <a:ext cx="1052383" cy="178308"/>
+          </a:xfrm>
+          <a:prstGeom prst="rect">
+            <a:avLst/>
+          </a:prstGeom>
+          <a:noFill/>
+          <a:ln/>
+        </p:spPr>
+        <p:txBody>
+          <a:bodyPr wrap="none" lIns="0" tIns="0" rIns="0" bIns="0" rtlCol="0" anchor="t"/>
+          <a:lstStyle/>
+          <a:p>
+            <a:pPr algn="l" indent="0" marL="0">
+              <a:lnSpc>
+                <a:spcPts val="1404"/>
+              </a:lnSpc>
+              <a:buNone/>
+            </a:pPr>
+            <a:r>
+              <a:rPr lang="en-US" sz="936" spc="-54" kern="0" dirty="0">
+                <a:solidFill>
+                  <a:srgbClr val="E2E8F0"/>
+                </a:solidFill>
+                <a:latin typeface="Consolas" pitchFamily="34" charset="0"/>
+                <a:ea typeface="Consolas" pitchFamily="34" charset="-122"/>
+                <a:cs typeface="Consolas" pitchFamily="34" charset="-120"/>
+              </a:rPr>
+              <a:t>0.00%</a:t>
+            </a:r>
+            <a:endParaRPr lang="en-US" sz="936" dirty="0"/>
+          </a:p>
+        </p:txBody>
+      </p:sp>
+      <p:sp>
+        <p:nvSpPr>
+          <p:cNvPr id="37" name="Shape 35"/>
+          <p:cNvSpPr/>
+          <p:nvPr/>
+        </p:nvSpPr>
+        <p:spPr>
+          <a:xfrm>
+            <a:off x="3051901" y="4006352"/>
+            <a:ext cx="1166317" cy="378379"/>
+          </a:xfrm>
+          <a:prstGeom prst="rect">
+            <a:avLst/>
+          </a:prstGeom>
+          <a:ln w="9525">
+            <a:solidFill>
+              <a:srgbClr val="1E293B"/>
+            </a:solidFill>
+            <a:prstDash val="solid"/>
+          </a:ln>
+        </p:spPr>
+      </p:sp>
+      <p:sp>
+        <p:nvSpPr>
+          <p:cNvPr id="38" name="Text 36"/>
+          <p:cNvSpPr txBox="1"/>
+          <p:nvPr/>
+        </p:nvSpPr>
+        <p:spPr>
+          <a:xfrm>
+            <a:off x="3137672" y="4098158"/>
+            <a:ext cx="1052383" cy="178308"/>
+          </a:xfrm>
+          <a:prstGeom prst="rect">
+            <a:avLst/>
+          </a:prstGeom>
+          <a:noFill/>
+          <a:ln/>
+        </p:spPr>
+        <p:txBody>
+          <a:bodyPr wrap="none" lIns="0" tIns="0" rIns="0" bIns="0" rtlCol="0" anchor="t"/>
+          <a:lstStyle/>
+          <a:p>
+            <a:pPr algn="l" indent="0" marL="0">
+              <a:lnSpc>
+                <a:spcPts val="1404"/>
+              </a:lnSpc>
+              <a:buNone/>
+            </a:pPr>
+            <a:r>
+              <a:rPr lang="en-US" sz="936" spc="-54" kern="0" dirty="0">
+                <a:solidFill>
+                  <a:srgbClr val="E2E8F0"/>
+                </a:solidFill>
+                <a:latin typeface="Consolas" pitchFamily="34" charset="0"/>
+                <a:ea typeface="Consolas" pitchFamily="34" charset="-122"/>
+                <a:cs typeface="Consolas" pitchFamily="34" charset="-120"/>
+              </a:rPr>
+              <a:t>0.35% (High)</a:t>
+            </a:r>
+            <a:endParaRPr lang="en-US" sz="936" dirty="0"/>
+          </a:p>
+        </p:txBody>
+      </p:sp>
+      <p:sp>
+        <p:nvSpPr>
+          <p:cNvPr id="39" name="Shape 37"/>
+          <p:cNvSpPr/>
+          <p:nvPr/>
+        </p:nvSpPr>
+        <p:spPr>
+          <a:xfrm>
+            <a:off x="4218219" y="4006352"/>
+            <a:ext cx="1681673" cy="378379"/>
+          </a:xfrm>
+          <a:prstGeom prst="rect">
+            <a:avLst/>
+          </a:prstGeom>
+          <a:ln w="9525">
+            <a:solidFill>
+              <a:srgbClr val="1E293B"/>
+            </a:solidFill>
+            <a:prstDash val="solid"/>
+          </a:ln>
+        </p:spPr>
+      </p:sp>
+      <p:sp>
+        <p:nvSpPr>
+          <p:cNvPr id="40" name="Text 38"/>
+          <p:cNvSpPr txBox="1"/>
+          <p:nvPr/>
+        </p:nvSpPr>
+        <p:spPr>
+          <a:xfrm>
+            <a:off x="4303989" y="4098158"/>
+            <a:ext cx="1608887" cy="178308"/>
+          </a:xfrm>
+          <a:prstGeom prst="rect">
+            <a:avLst/>
+          </a:prstGeom>
+          <a:noFill/>
+          <a:ln/>
+        </p:spPr>
+        <p:txBody>
+          <a:bodyPr wrap="none" lIns="0" tIns="0" rIns="0" bIns="0" rtlCol="0" anchor="t"/>
+          <a:lstStyle/>
+          <a:p>
+            <a:pPr algn="l" indent="0" marL="0">
+              <a:lnSpc>
+                <a:spcPts val="1404"/>
+              </a:lnSpc>
+              <a:buNone/>
+            </a:pPr>
+            <a:r>
+              <a:rPr lang="en-US" sz="936" b="1" spc="-54" kern="0" dirty="0">
+                <a:solidFill>
+                  <a:srgbClr val="00F0FF"/>
+                </a:solidFill>
+                <a:latin typeface="Consolas" pitchFamily="34" charset="0"/>
+                <a:ea typeface="Consolas" pitchFamily="34" charset="-122"/>
+                <a:cs typeface="Consolas" pitchFamily="34" charset="-120"/>
+              </a:rPr>
+              <a:t>0.01% (Tensor Backprop)</a:t>
+            </a:r>
+            <a:endParaRPr lang="en-US" sz="936" dirty="0"/>
+          </a:p>
+        </p:txBody>
+      </p:sp>
+      <p:sp>
+        <p:nvSpPr>
+          <p:cNvPr id="41" name="Shape 39"/>
+          <p:cNvSpPr/>
+          <p:nvPr/>
+        </p:nvSpPr>
+        <p:spPr>
+          <a:xfrm>
+            <a:off x="719176" y="4384639"/>
+            <a:ext cx="5180716" cy="9510"/>
+          </a:xfrm>
+          <a:prstGeom prst="rect">
+            <a:avLst/>
+          </a:prstGeom>
+          <a:solidFill>
+            <a:srgbClr val="D1D9E0">
+              <a:alpha val="70000"/>
+            </a:srgbClr>
+          </a:solidFill>
+          <a:ln/>
+        </p:spPr>
+      </p:sp>
+      <p:sp>
+        <p:nvSpPr>
+          <p:cNvPr id="42" name="Shape 40"/>
+          <p:cNvSpPr/>
+          <p:nvPr/>
+        </p:nvSpPr>
+        <p:spPr>
+          <a:xfrm>
+            <a:off x="719176" y="4384639"/>
+            <a:ext cx="1166317" cy="378379"/>
+          </a:xfrm>
+          <a:prstGeom prst="rect">
+            <a:avLst/>
+          </a:prstGeom>
+          <a:ln w="9525">
+            <a:solidFill>
+              <a:srgbClr val="1E293B"/>
+            </a:solidFill>
+            <a:prstDash val="solid"/>
+          </a:ln>
+        </p:spPr>
+      </p:sp>
+      <p:sp>
+        <p:nvSpPr>
+          <p:cNvPr id="43" name="Text 41"/>
+          <p:cNvSpPr txBox="1"/>
+          <p:nvPr/>
+        </p:nvSpPr>
+        <p:spPr>
+          <a:xfrm>
+            <a:off x="804855" y="4476445"/>
+            <a:ext cx="1052383" cy="178308"/>
+          </a:xfrm>
+          <a:prstGeom prst="rect">
+            <a:avLst/>
+          </a:prstGeom>
+          <a:noFill/>
+          <a:ln/>
+        </p:spPr>
+        <p:txBody>
+          <a:bodyPr wrap="none" lIns="0" tIns="0" rIns="0" bIns="0" rtlCol="0" anchor="t"/>
+          <a:lstStyle/>
+          <a:p>
+            <a:pPr algn="l" indent="0" marL="0">
+              <a:lnSpc>
+                <a:spcPts val="1404"/>
+              </a:lnSpc>
+              <a:buNone/>
+            </a:pPr>
+            <a:r>
+              <a:rPr lang="en-US" sz="936" b="1" spc="-54" kern="0" dirty="0">
+                <a:solidFill>
+                  <a:srgbClr val="E2E8F0"/>
+                </a:solidFill>
+                <a:latin typeface="Consolas" pitchFamily="34" charset="0"/>
+                <a:ea typeface="Consolas" pitchFamily="34" charset="-122"/>
+                <a:cs typeface="Consolas" pitchFamily="34" charset="-120"/>
+              </a:rPr>
+              <a:t>128-Qubit Exec</a:t>
+            </a:r>
+            <a:endParaRPr lang="en-US" sz="936" dirty="0"/>
+          </a:p>
+        </p:txBody>
+      </p:sp>
+      <p:sp>
+        <p:nvSpPr>
+          <p:cNvPr id="44" name="Shape 42"/>
+          <p:cNvSpPr/>
+          <p:nvPr/>
+        </p:nvSpPr>
+        <p:spPr>
+          <a:xfrm>
+            <a:off x="1885493" y="4384639"/>
+            <a:ext cx="1166317" cy="378379"/>
+          </a:xfrm>
+          <a:prstGeom prst="rect">
+            <a:avLst/>
+          </a:prstGeom>
+          <a:ln w="9525">
+            <a:solidFill>
+              <a:srgbClr val="1E293B"/>
+            </a:solidFill>
+            <a:prstDash val="solid"/>
+          </a:ln>
+        </p:spPr>
+      </p:sp>
+      <p:sp>
+        <p:nvSpPr>
+          <p:cNvPr id="45" name="Text 43"/>
+          <p:cNvSpPr txBox="1"/>
+          <p:nvPr/>
+        </p:nvSpPr>
+        <p:spPr>
+          <a:xfrm>
+            <a:off x="1971172" y="4476445"/>
+            <a:ext cx="1052383" cy="178308"/>
+          </a:xfrm>
+          <a:prstGeom prst="rect">
+            <a:avLst/>
+          </a:prstGeom>
+          <a:noFill/>
+          <a:ln/>
+        </p:spPr>
+        <p:txBody>
+          <a:bodyPr wrap="none" lIns="0" tIns="0" rIns="0" bIns="0" rtlCol="0" anchor="t"/>
+          <a:lstStyle/>
+          <a:p>
+            <a:pPr algn="l" indent="0" marL="0">
+              <a:lnSpc>
+                <a:spcPts val="1404"/>
+              </a:lnSpc>
+              <a:buNone/>
+            </a:pPr>
+            <a:r>
+              <a:rPr lang="en-US" sz="936" spc="-54" kern="0" dirty="0">
+                <a:solidFill>
+                  <a:srgbClr val="E2E8F0"/>
+                </a:solidFill>
+                <a:latin typeface="Consolas" pitchFamily="34" charset="0"/>
+                <a:ea typeface="Consolas" pitchFamily="34" charset="-122"/>
+                <a:cs typeface="Consolas" pitchFamily="34" charset="-120"/>
+              </a:rPr>
+              <a:t>48.2 Hours</a:t>
+            </a:r>
+            <a:endParaRPr lang="en-US" sz="936" dirty="0"/>
+          </a:p>
+        </p:txBody>
+      </p:sp>
+      <p:sp>
+        <p:nvSpPr>
+          <p:cNvPr id="46" name="Shape 44"/>
+          <p:cNvSpPr/>
+          <p:nvPr/>
+        </p:nvSpPr>
+        <p:spPr>
+          <a:xfrm>
+            <a:off x="3051901" y="4384639"/>
+            <a:ext cx="1166317" cy="378379"/>
+          </a:xfrm>
+          <a:prstGeom prst="rect">
+            <a:avLst/>
+          </a:prstGeom>
+          <a:ln w="9525">
+            <a:solidFill>
+              <a:srgbClr val="1E293B"/>
+            </a:solidFill>
+            <a:prstDash val="solid"/>
+          </a:ln>
+        </p:spPr>
+      </p:sp>
+      <p:sp>
+        <p:nvSpPr>
+          <p:cNvPr id="47" name="Text 45"/>
+          <p:cNvSpPr txBox="1"/>
+          <p:nvPr/>
+        </p:nvSpPr>
+        <p:spPr>
+          <a:xfrm>
+            <a:off x="3137672" y="4476445"/>
+            <a:ext cx="1052383" cy="178308"/>
+          </a:xfrm>
+          <a:prstGeom prst="rect">
+            <a:avLst/>
+          </a:prstGeom>
+          <a:noFill/>
+          <a:ln/>
+        </p:spPr>
+        <p:txBody>
+          <a:bodyPr wrap="none" lIns="0" tIns="0" rIns="0" bIns="0" rtlCol="0" anchor="t"/>
+          <a:lstStyle/>
+          <a:p>
+            <a:pPr algn="l" indent="0" marL="0">
+              <a:lnSpc>
+                <a:spcPts val="1404"/>
+              </a:lnSpc>
+              <a:buNone/>
+            </a:pPr>
+            <a:r>
+              <a:rPr lang="en-US" sz="936" spc="-54" kern="0" dirty="0">
+                <a:solidFill>
+                  <a:srgbClr val="E2E8F0"/>
+                </a:solidFill>
+                <a:latin typeface="Consolas" pitchFamily="34" charset="0"/>
+                <a:ea typeface="Consolas" pitchFamily="34" charset="-122"/>
+                <a:cs typeface="Consolas" pitchFamily="34" charset="-120"/>
+              </a:rPr>
+              <a:t>Failed (Noise)</a:t>
+            </a:r>
+            <a:endParaRPr lang="en-US" sz="936" dirty="0"/>
+          </a:p>
+        </p:txBody>
+      </p:sp>
+      <p:sp>
+        <p:nvSpPr>
+          <p:cNvPr id="48" name="Shape 46"/>
+          <p:cNvSpPr/>
+          <p:nvPr/>
+        </p:nvSpPr>
+        <p:spPr>
+          <a:xfrm>
+            <a:off x="4218219" y="4384639"/>
+            <a:ext cx="1681673" cy="378379"/>
+          </a:xfrm>
+          <a:prstGeom prst="rect">
+            <a:avLst/>
+          </a:prstGeom>
+          <a:ln w="9525">
+            <a:solidFill>
+              <a:srgbClr val="1E293B"/>
+            </a:solidFill>
+            <a:prstDash val="solid"/>
+          </a:ln>
+        </p:spPr>
+      </p:sp>
+      <p:sp>
+        <p:nvSpPr>
+          <p:cNvPr id="49" name="Text 47"/>
+          <p:cNvSpPr txBox="1"/>
+          <p:nvPr/>
+        </p:nvSpPr>
+        <p:spPr>
+          <a:xfrm>
+            <a:off x="4303989" y="4476445"/>
+            <a:ext cx="1608887" cy="178308"/>
+          </a:xfrm>
+          <a:prstGeom prst="rect">
+            <a:avLst/>
+          </a:prstGeom>
+          <a:noFill/>
+          <a:ln/>
+        </p:spPr>
+        <p:txBody>
+          <a:bodyPr wrap="none" lIns="0" tIns="0" rIns="0" bIns="0" rtlCol="0" anchor="t"/>
+          <a:lstStyle/>
+          <a:p>
+            <a:pPr algn="l" indent="0" marL="0">
+              <a:lnSpc>
+                <a:spcPts val="1404"/>
+              </a:lnSpc>
+              <a:buNone/>
+            </a:pPr>
+            <a:r>
+              <a:rPr lang="en-US" sz="936" b="1" spc="-54" kern="0" dirty="0">
+                <a:solidFill>
+                  <a:srgbClr val="00F0FF"/>
+                </a:solidFill>
+                <a:latin typeface="Consolas" pitchFamily="34" charset="0"/>
+                <a:ea typeface="Consolas" pitchFamily="34" charset="-122"/>
+                <a:cs typeface="Consolas" pitchFamily="34" charset="-120"/>
+              </a:rPr>
+              <a:t>2.4 Minutes (1,200x)</a:t>
+            </a:r>
+            <a:endParaRPr lang="en-US" sz="936" dirty="0"/>
+          </a:p>
+        </p:txBody>
+      </p:sp>
+      <p:sp>
+        <p:nvSpPr>
+          <p:cNvPr id="50" name="Text 48"/>
+          <p:cNvSpPr txBox="1"/>
+          <p:nvPr/>
+        </p:nvSpPr>
+        <p:spPr>
+          <a:xfrm>
+            <a:off x="695310" y="6111118"/>
+            <a:ext cx="11643330" cy="164592"/>
+          </a:xfrm>
+          <a:prstGeom prst="rect">
+            <a:avLst/>
+          </a:prstGeom>
+          <a:noFill/>
+          <a:ln/>
+        </p:spPr>
+        <p:txBody>
+          <a:bodyPr wrap="none" lIns="0" tIns="0" rIns="0" bIns="0" rtlCol="0" anchor="t"/>
+          <a:lstStyle/>
+          <a:p>
+            <a:pPr algn="l" indent="0" marL="0">
+              <a:lnSpc>
+                <a:spcPts val="1296"/>
+              </a:lnSpc>
+              <a:buNone/>
+            </a:pPr>
+            <a:r>
+              <a:rPr lang="en-US" sz="864" spc="-54" kern="0" dirty="0">
+                <a:solidFill>
+                  <a:srgbClr val="64748B"/>
+                </a:solidFill>
+                <a:latin typeface="Consolas" pitchFamily="34" charset="0"/>
+                <a:ea typeface="Consolas" pitchFamily="34" charset="-122"/>
+                <a:cs typeface="Consolas" pitchFamily="34" charset="-120"/>
+              </a:rPr>
+              <a:t>* Tested on 64x NVIDIA H100 GPU Cluster with Quantum Tensor Backpropagation v4.2</a:t>
+            </a:r>
+            <a:endParaRPr lang="en-US" sz="864" dirty="0"/>
+          </a:p>
+        </p:txBody>
+      </p:sp>
     </p:spTree>
   </p:cSld>
   <p:clrMapOvr>
